--- a/docs/deliverables/slide/movie_knowledge_graph_defense.pptx
+++ b/docs/deliverables/slide/movie_knowledge_graph_defense.pptx
@@ -4609,8 +4609,8 @@
         </p:blipFill>
         <p:spPr>
           <a:xfrm>
-            <a:off x="7013448" y="2030147"/>
-            <a:ext cx="4489704" cy="1654706"/>
+            <a:off x="7013448" y="2137776"/>
+            <a:ext cx="4489704" cy="1439447"/>
           </a:xfrm>
           <a:prstGeom prst="rect">
             <a:avLst/>
@@ -5008,8 +5008,8 @@
         </p:blipFill>
         <p:spPr>
           <a:xfrm>
-            <a:off x="1233312" y="1865376"/>
-            <a:ext cx="9658319" cy="3346704"/>
+            <a:off x="676656" y="1896090"/>
+            <a:ext cx="10771632" cy="3285275"/>
           </a:xfrm>
           <a:prstGeom prst="rect">
             <a:avLst/>
@@ -7046,8 +7046,8 @@
         </p:blipFill>
         <p:spPr>
           <a:xfrm>
-            <a:off x="685800" y="2677823"/>
-            <a:ext cx="7187184" cy="2453329"/>
+            <a:off x="685800" y="2817893"/>
+            <a:ext cx="7187184" cy="2173191"/>
           </a:xfrm>
           <a:prstGeom prst="rect">
             <a:avLst/>
@@ -8893,8 +8893,8 @@
         </p:blipFill>
         <p:spPr>
           <a:xfrm>
-            <a:off x="704088" y="1986635"/>
-            <a:ext cx="7095744" cy="3835706"/>
+            <a:off x="704088" y="2096005"/>
+            <a:ext cx="7095744" cy="3616967"/>
           </a:xfrm>
           <a:prstGeom prst="rect">
             <a:avLst/>
@@ -9532,8 +9532,8 @@
         </p:blipFill>
         <p:spPr>
           <a:xfrm>
-            <a:off x="676656" y="2073402"/>
-            <a:ext cx="7324344" cy="3662172"/>
+            <a:off x="676656" y="2201322"/>
+            <a:ext cx="7324344" cy="3406332"/>
           </a:xfrm>
           <a:prstGeom prst="rect">
             <a:avLst/>
@@ -10171,8 +10171,8 @@
         </p:blipFill>
         <p:spPr>
           <a:xfrm>
-            <a:off x="685800" y="2778741"/>
-            <a:ext cx="6894576" cy="2251494"/>
+            <a:off x="685800" y="2952448"/>
+            <a:ext cx="6894576" cy="1904081"/>
           </a:xfrm>
           <a:prstGeom prst="rect">
             <a:avLst/>
@@ -11024,8 +11024,8 @@
         </p:blipFill>
         <p:spPr>
           <a:xfrm>
-            <a:off x="676656" y="2466817"/>
-            <a:ext cx="6867144" cy="2857054"/>
+            <a:off x="676656" y="2558786"/>
+            <a:ext cx="6867144" cy="2673116"/>
           </a:xfrm>
           <a:prstGeom prst="rect">
             <a:avLst/>
@@ -11943,8 +11943,8 @@
         </p:blipFill>
         <p:spPr>
           <a:xfrm>
-            <a:off x="704088" y="3002072"/>
-            <a:ext cx="6409944" cy="1804832"/>
+            <a:off x="704088" y="3304108"/>
+            <a:ext cx="6409944" cy="1200761"/>
           </a:xfrm>
           <a:prstGeom prst="rect">
             <a:avLst/>
@@ -14829,8 +14829,8 @@
         </p:blipFill>
         <p:spPr>
           <a:xfrm>
-            <a:off x="676656" y="2682129"/>
-            <a:ext cx="6409944" cy="2362422"/>
+            <a:off x="676656" y="2835792"/>
+            <a:ext cx="6409944" cy="2055097"/>
           </a:xfrm>
           <a:prstGeom prst="rect">
             <a:avLst/>
@@ -26246,8 +26246,8 @@
         </p:blipFill>
         <p:spPr>
           <a:xfrm>
-            <a:off x="694944" y="2127052"/>
-            <a:ext cx="10780776" cy="3500009"/>
+            <a:off x="694944" y="2416938"/>
+            <a:ext cx="10780776" cy="2920236"/>
           </a:xfrm>
           <a:prstGeom prst="rect">
             <a:avLst/>
@@ -27576,8 +27576,8 @@
         </p:blipFill>
         <p:spPr>
           <a:xfrm>
-            <a:off x="676656" y="2494304"/>
-            <a:ext cx="7232904" cy="2802081"/>
+            <a:off x="676656" y="2672095"/>
+            <a:ext cx="7232904" cy="2446498"/>
           </a:xfrm>
           <a:prstGeom prst="rect">
             <a:avLst/>

--- a/docs/deliverables/slide/movie_knowledge_graph_defense.pptx
+++ b/docs/deliverables/slide/movie_knowledge_graph_defense.pptx
@@ -5032,7 +5032,7 @@
                 <a:ea typeface="Calibri" pitchFamily="34" charset="-122"/>
                 <a:cs typeface="Calibri" pitchFamily="34" charset="-120"/>
               </a:rPr>
-              <a:t>Khái niệm · Property Graph · Schema · Identity · Suy diễn · Cypher</a:t>
+              <a:t>Từ định danh và schema đến truy vấn, suy diễn và khả năng giải thích</a:t>
             </a:r>
             <a:endParaRPr lang="en-US" sz="1550" dirty="0"/>
           </a:p>
@@ -5373,7 +5373,7 @@
                 <a:ea typeface="Calibri" pitchFamily="34" charset="-122"/>
                 <a:cs typeface="Calibri" pitchFamily="34" charset="-120"/>
               </a:rPr>
-              <a:t>Từ vựng traversal được dùng xuyên suốt project</a:t>
+              <a:t>Bốn khái niệm giúp mô tả cách duyệt đồ thị</a:t>
             </a:r>
             <a:endParaRPr lang="en-US" sz="2600" dirty="0"/>
           </a:p>
@@ -5414,7 +5414,7 @@
                 <a:ea typeface="Calibri" pitchFamily="34" charset="-122"/>
                 <a:cs typeface="Calibri" pitchFamily="34" charset="-120"/>
               </a:rPr>
-              <a:t>Hiểu hop, degree, common neighbor và shortest path giúp đọc đúng cả Cypher lẫn bằng chứng trả về.</a:t>
+              <a:t>Mỗi khái niệm trả lời một câu hỏi khác nhau về khoảng cách, mức kết nối hoặc cấu trúc chung giữa các thực thể.</a:t>
             </a:r>
             <a:endParaRPr lang="en-US" sz="1250" dirty="0"/>
           </a:p>
@@ -5553,7 +5553,7 @@
                 <a:ea typeface="Calibri" pitchFamily="34" charset="-122"/>
                 <a:cs typeface="Calibri" pitchFamily="34" charset="-120"/>
               </a:rPr>
-              <a:t>Hop</a:t>
+              <a:t>Bước đi (hop)</a:t>
             </a:r>
             <a:endParaRPr lang="en-US" sz="1900" dirty="0"/>
           </a:p>
@@ -5594,7 +5594,7 @@
                 <a:ea typeface="Calibri" pitchFamily="34" charset="-122"/>
                 <a:cs typeface="Calibri" pitchFamily="34" charset="-120"/>
               </a:rPr>
-              <a:t>Một lần đi qua relationship. Person → Movie là 1 hop; Person → Movie → Genre là 2 hop.</a:t>
+              <a:t>Một hop là một lần đi qua cạnh. Person → Movie dài 1 hop; Person → Movie → Genre dài 2 hop. Số hop cho biết truy vấn phải đi qua bao nhiêu lớp quan hệ.</a:t>
             </a:r>
             <a:endParaRPr lang="en-US" sz="1300" dirty="0"/>
           </a:p>
@@ -5733,7 +5733,7 @@
                 <a:ea typeface="Calibri" pitchFamily="34" charset="-122"/>
                 <a:cs typeface="Calibri" pitchFamily="34" charset="-120"/>
               </a:rPr>
-              <a:t>Degree</a:t>
+              <a:t>Bậc của node (degree)</a:t>
             </a:r>
             <a:endParaRPr lang="en-US" sz="1900" dirty="0"/>
           </a:p>
@@ -5774,7 +5774,7 @@
                 <a:ea typeface="Calibri" pitchFamily="34" charset="-122"/>
                 <a:cs typeface="Calibri" pitchFamily="34" charset="-120"/>
               </a:rPr>
-              <a:t>Số relationship kề một node. Degree cao có thể biểu thị thực thể phổ biến nhưng cũng gây thiên lệch khi xếp hạng.</a:t>
+              <a:t>Degree là số cạnh kề một node. Degree cao có thể cho biết thực thể phổ biến, nhưng cũng có thể làm các đặc trưng phổ biến lấn át kết quả xếp hạng.</a:t>
             </a:r>
             <a:endParaRPr lang="en-US" sz="1300" dirty="0"/>
           </a:p>
@@ -5913,7 +5913,7 @@
                 <a:ea typeface="Calibri" pitchFamily="34" charset="-122"/>
                 <a:cs typeface="Calibri" pitchFamily="34" charset="-120"/>
               </a:rPr>
-              <a:t>Common neighbor</a:t>
+              <a:t>Láng giềng chung</a:t>
             </a:r>
             <a:endParaRPr lang="en-US" sz="1900" dirty="0"/>
           </a:p>
@@ -5954,7 +5954,7 @@
                 <a:ea typeface="Calibri" pitchFamily="34" charset="-122"/>
                 <a:cs typeface="Calibri" pitchFamily="34" charset="-120"/>
               </a:rPr>
-              <a:t>Node lân cận được hai node cùng chia sẻ. Hai Person có Movie chung; hai Movie có actor/genre/keyword chung.</a:t>
+              <a:t>Common neighbor là node được hai node cùng kết nối. Hai Person có thể chung một Movie; hai Movie có thể chung diễn viên, thể loại hoặc từ khóa.</a:t>
             </a:r>
             <a:endParaRPr lang="en-US" sz="1300" dirty="0"/>
           </a:p>
@@ -6093,7 +6093,7 @@
                 <a:ea typeface="Calibri" pitchFamily="34" charset="-122"/>
                 <a:cs typeface="Calibri" pitchFamily="34" charset="-120"/>
               </a:rPr>
-              <a:t>Shortest path</a:t>
+              <a:t>Đường đi ngắn nhất</a:t>
             </a:r>
             <a:endParaRPr lang="en-US" sz="1900" dirty="0"/>
           </a:p>
@@ -6134,7 +6134,7 @@
                 <a:ea typeface="Calibri" pitchFamily="34" charset="-122"/>
                 <a:cs typeface="Calibri" pitchFamily="34" charset="-120"/>
               </a:rPr>
-              <a:t>Đường đi có số cạnh nhỏ nhất trong phạm vi quan hệ cho phép. Kết quả cần đọc kèm loại cạnh, không chỉ danh sách node.</a:t>
+              <a:t>Shortest path là đường có ít cạnh nhất trong phạm vi quan hệ cho phép. Muốn hiểu kết quả, phải đọc cả loại cạnh trên đường đi chứ không chỉ danh sách node.</a:t>
             </a:r>
             <a:endParaRPr lang="en-US" sz="1300" dirty="0"/>
           </a:p>
@@ -6175,7 +6175,7 @@
                 <a:ea typeface="Calibri" pitchFamily="34" charset="-122"/>
                 <a:cs typeface="Calibri" pitchFamily="34" charset="-120"/>
               </a:rPr>
-              <a:t>Trong project: common_movies dùng shared neighbor; co-star là common neighbor được vật chất hóa; recommendation dùng weighted neighborhood overlap; shortest_path bị giới hạn tối đa 8 cạnh.</a:t>
+              <a:t>Trong dự án: phim chung dựa trên láng giềng chung; quan hệ đồng diễn vật chất hóa cấu trúc đó; gợi ý so sánh lân cận có trọng số; truy vấn đường đi được giới hạn tối đa 8 cạnh.</a:t>
             </a:r>
             <a:endParaRPr lang="en-US" sz="1350" dirty="0"/>
           </a:p>
@@ -7617,7 +7617,7 @@
                 <a:ea typeface="Calibri" pitchFamily="34" charset="-122"/>
                 <a:cs typeface="Calibri" pitchFamily="34" charset="-120"/>
               </a:rPr>
-              <a:t>Property-rich relationships</a:t>
+              <a:t>Quan hệ có thể mang thuộc tính</a:t>
             </a:r>
             <a:endParaRPr lang="en-US" sz="2000" dirty="0"/>
           </a:p>
@@ -7968,7 +7968,7 @@
                 <a:ea typeface="Calibri" pitchFamily="34" charset="-122"/>
                 <a:cs typeface="Calibri" pitchFamily="34" charset="-120"/>
               </a:rPr>
-              <a:t>Nguồn dữ liệu</a:t>
+              <a:t>Cung cấp dữ liệu nguồn</a:t>
             </a:r>
             <a:endParaRPr lang="en-US" sz="1200" dirty="0"/>
           </a:p>
@@ -8108,7 +8108,7 @@
                 <a:ea typeface="Calibri" pitchFamily="34" charset="-122"/>
                 <a:cs typeface="Calibri" pitchFamily="34" charset="-120"/>
               </a:rPr>
-              <a:t>JSON · GZIP</a:t>
+              <a:t>Giữ nguyên JSON và GZIP</a:t>
             </a:r>
             <a:endParaRPr lang="en-US" sz="1200" dirty="0"/>
           </a:p>
@@ -8207,7 +8207,7 @@
                 <a:ea typeface="Calibri" pitchFamily="34" charset="-122"/>
                 <a:cs typeface="Calibri" pitchFamily="34" charset="-120"/>
               </a:rPr>
-              <a:t>Processing</a:t>
+              <a:t>Xử lý</a:t>
             </a:r>
             <a:endParaRPr lang="en-US" sz="1700" dirty="0"/>
           </a:p>
@@ -8248,7 +8248,7 @@
                 <a:ea typeface="Calibri" pitchFamily="34" charset="-122"/>
                 <a:cs typeface="Calibri" pitchFamily="34" charset="-120"/>
               </a:rPr>
-              <a:t>Clean · exact join · CSV</a:t>
+              <a:t>Làm sạch, nối ID, chuẩn hóa</a:t>
             </a:r>
             <a:endParaRPr lang="en-US" sz="1200" dirty="0"/>
           </a:p>
@@ -8388,7 +8388,7 @@
                 <a:ea typeface="Calibri" pitchFamily="34" charset="-122"/>
                 <a:cs typeface="Calibri" pitchFamily="34" charset="-120"/>
               </a:rPr>
-              <a:t>Constraint · import · reasoning</a:t>
+              <a:t>Bảo vệ, nhập và suy diễn</a:t>
             </a:r>
             <a:endParaRPr lang="en-US" sz="1200" dirty="0"/>
           </a:p>
@@ -8528,7 +8528,7 @@
                 <a:ea typeface="Calibri" pitchFamily="34" charset="-122"/>
                 <a:cs typeface="Calibri" pitchFamily="34" charset="-120"/>
               </a:rPr>
-              <a:t>QA · recommendation</a:t>
+              <a:t>Điều phối hỏi–đáp và gợi ý</a:t>
             </a:r>
             <a:endParaRPr lang="en-US" sz="1200" dirty="0"/>
           </a:p>
@@ -8627,7 +8627,7 @@
                 <a:ea typeface="Calibri" pitchFamily="34" charset="-122"/>
                 <a:cs typeface="Calibri" pitchFamily="34" charset="-120"/>
               </a:rPr>
-              <a:t>Web UI</a:t>
+              <a:t>Giao diện</a:t>
             </a:r>
             <a:endParaRPr lang="en-US" sz="1700" dirty="0"/>
           </a:p>
@@ -8668,7 +8668,7 @@
                 <a:ea typeface="Calibri" pitchFamily="34" charset="-122"/>
                 <a:cs typeface="Calibri" pitchFamily="34" charset="-120"/>
               </a:rPr>
-              <a:t>Answer · evidence</a:t>
+              <a:t>Trình bày kết quả và bằng chứng</a:t>
             </a:r>
             <a:endParaRPr lang="en-US" sz="1200" dirty="0"/>
           </a:p>
@@ -8736,7 +8736,7 @@
                 <a:ea typeface="Calibri" pitchFamily="34" charset="-122"/>
                 <a:cs typeface="Calibri" pitchFamily="34" charset="-120"/>
               </a:rPr>
-              <a:t>Reproducibility</a:t>
+              <a:t>Khả năng tái lập</a:t>
             </a:r>
             <a:endParaRPr lang="en-US" sz="1300" dirty="0"/>
           </a:p>
@@ -8769,7 +8769,7 @@
               <a:buNone/>
             </a:pPr>
             <a:r>
-              <a:rPr lang="en-US" sz="1000" dirty="0">
+              <a:rPr lang="en-US" sz="950" dirty="0">
                 <a:solidFill>
                   <a:srgbClr val="172B3A"/>
                 </a:solidFill>
@@ -8777,9 +8777,9 @@
                 <a:ea typeface="Calibri" pitchFamily="34" charset="-122"/>
                 <a:cs typeface="Calibri" pitchFamily="34" charset="-120"/>
               </a:rPr>
-              <a:t>Checksum + manifest quyết định import hay reuse.</a:t>
-            </a:r>
-            <a:endParaRPr lang="en-US" sz="1000" dirty="0"/>
+              <a:t>Checksum và manifest xác định rõ khi nào phải nhập lại dữ liệu.</a:t>
+            </a:r>
+            <a:endParaRPr lang="en-US" sz="950" dirty="0"/>
           </a:p>
         </p:txBody>
       </p:sp>
@@ -8845,7 +8845,7 @@
                 <a:ea typeface="Calibri" pitchFamily="34" charset="-122"/>
                 <a:cs typeface="Calibri" pitchFamily="34" charset="-120"/>
               </a:rPr>
-              <a:t>Explainability</a:t>
+              <a:t>Khả năng giải thích</a:t>
             </a:r>
             <a:endParaRPr lang="en-US" sz="1300" dirty="0"/>
           </a:p>
@@ -8878,7 +8878,7 @@
               <a:buNone/>
             </a:pPr>
             <a:r>
-              <a:rPr lang="en-US" sz="1000" dirty="0">
+              <a:rPr lang="en-US" sz="950" dirty="0">
                 <a:solidFill>
                   <a:srgbClr val="172B3A"/>
                 </a:solidFill>
@@ -8886,9 +8886,9 @@
                 <a:ea typeface="Calibri" pitchFamily="34" charset="-122"/>
                 <a:cs typeface="Calibri" pitchFamily="34" charset="-120"/>
               </a:rPr>
-              <a:t>Entity link, graph row/path và shared feature.</a:t>
-            </a:r>
-            <a:endParaRPr lang="en-US" sz="1000" dirty="0"/>
+              <a:t>Kết quả giữ thực thể đã liên kết, đường đi và đặc trưng tạo điểm.</a:t>
+            </a:r>
+            <a:endParaRPr lang="en-US" sz="950" dirty="0"/>
           </a:p>
         </p:txBody>
       </p:sp>
@@ -10244,7 +10244,7 @@
               <a:buNone/>
             </a:pPr>
             <a:r>
-              <a:rPr lang="en-US" sz="1500" b="1" dirty="0">
+              <a:rPr lang="en-US" sz="1450" b="1" dirty="0">
                 <a:solidFill>
                   <a:srgbClr val="112B46"/>
                 </a:solidFill>
@@ -10252,9 +10252,9 @@
                 <a:ea typeface="Calibri" pitchFamily="34" charset="-122"/>
                 <a:cs typeface="Calibri" pitchFamily="34" charset="-120"/>
               </a:rPr>
-              <a:t>Định danh ổn định</a:t>
-            </a:r>
-            <a:endParaRPr lang="en-US" sz="1500" dirty="0"/>
+              <a:t>Tên không quyết định danh tính</a:t>
+            </a:r>
+            <a:endParaRPr lang="en-US" sz="1450" dirty="0"/>
           </a:p>
         </p:txBody>
       </p:sp>
@@ -10285,7 +10285,7 @@
               <a:buNone/>
             </a:pPr>
             <a:r>
-              <a:rPr lang="en-US" sz="1100" dirty="0">
+              <a:rPr lang="en-US" sz="1030" dirty="0">
                 <a:solidFill>
                   <a:srgbClr val="172B3A"/>
                 </a:solidFill>
@@ -10293,26 +10293,9 @@
                 <a:ea typeface="Calibri" pitchFamily="34" charset="-122"/>
                 <a:cs typeface="Calibri" pitchFamily="34" charset="-120"/>
               </a:rPr>
-              <a:t>`Person.person_id = tmdb:&lt;id&gt;`</a:t>
-            </a:r>
-            <a:endParaRPr lang="en-US" sz="1100" dirty="0"/>
-          </a:p>
-          <a:p>
-            <a:pPr indent="0" marL="0">
-              <a:buNone/>
-            </a:pPr>
-            <a:r>
-              <a:rPr lang="en-US" sz="1100" dirty="0">
-                <a:solidFill>
-                  <a:srgbClr val="172B3A"/>
-                </a:solidFill>
-                <a:latin typeface="Calibri" pitchFamily="34" charset="0"/>
-                <a:ea typeface="Calibri" pitchFamily="34" charset="-122"/>
-                <a:cs typeface="Calibri" pitchFamily="34" charset="-120"/>
-              </a:rPr>
-              <a:t>Tên không phải khóa chính.</a:t>
-            </a:r>
-            <a:endParaRPr lang="en-US" sz="1100" dirty="0"/>
+              <a:t>`Person.person_id = tmdb:&lt;id&gt;` là khóa ổn định; `name` chỉ dùng để hiển thị và tìm kiếm.</a:t>
+            </a:r>
+            <a:endParaRPr lang="en-US" sz="1030" dirty="0"/>
           </a:p>
         </p:txBody>
       </p:sp>
@@ -10377,7 +10360,7 @@
               <a:buNone/>
             </a:pPr>
             <a:r>
-              <a:rPr lang="en-US" sz="1500" b="1" dirty="0">
+              <a:rPr lang="en-US" sz="1450" b="1" dirty="0">
                 <a:solidFill>
                   <a:srgbClr val="112B46"/>
                 </a:solidFill>
@@ -10385,9 +10368,9 @@
                 <a:ea typeface="Calibri" pitchFamily="34" charset="-122"/>
                 <a:cs typeface="Calibri" pitchFamily="34" charset="-120"/>
               </a:rPr>
-              <a:t>Vai trò trên cạnh</a:t>
-            </a:r>
-            <a:endParaRPr lang="en-US" sz="1500" dirty="0"/>
+              <a:t>Vai trò được đặt trên quan hệ</a:t>
+            </a:r>
+            <a:endParaRPr lang="en-US" sz="1450" dirty="0"/>
           </a:p>
         </p:txBody>
       </p:sp>
@@ -10418,7 +10401,7 @@
               <a:buNone/>
             </a:pPr>
             <a:r>
-              <a:rPr lang="en-US" sz="1100" dirty="0">
+              <a:rPr lang="en-US" sz="1000" dirty="0">
                 <a:solidFill>
                   <a:srgbClr val="172B3A"/>
                 </a:solidFill>
@@ -10426,9 +10409,9 @@
                 <a:ea typeface="Calibri" pitchFamily="34" charset="-122"/>
                 <a:cs typeface="Calibri" pitchFamily="34" charset="-120"/>
               </a:rPr>
-              <a:t>`ACTED_IN` giữ character, cast_order và source.</a:t>
-            </a:r>
-            <a:endParaRPr lang="en-US" sz="1100" dirty="0"/>
+              <a:t>`ACTED_IN` cho biết một Person tham gia Movie nào và lưu nhân vật, thứ tự diễn viên, nguồn dữ liệu.</a:t>
+            </a:r>
+            <a:endParaRPr lang="en-US" sz="1000" dirty="0"/>
           </a:p>
         </p:txBody>
       </p:sp>
@@ -10493,7 +10476,7 @@
               <a:buNone/>
             </a:pPr>
             <a:r>
-              <a:rPr lang="en-US" sz="1500" b="1" dirty="0">
+              <a:rPr lang="en-US" sz="1450" b="1" dirty="0">
                 <a:solidFill>
                   <a:srgbClr val="112B46"/>
                 </a:solidFill>
@@ -10501,9 +10484,9 @@
                 <a:ea typeface="Calibri" pitchFamily="34" charset="-122"/>
                 <a:cs typeface="Calibri" pitchFamily="34" charset="-120"/>
               </a:rPr>
-              <a:t>Ràng buộc</a:t>
-            </a:r>
-            <a:endParaRPr lang="en-US" sz="1500" dirty="0"/>
+              <a:t>Schema được bảo vệ trước khi nhập</a:t>
+            </a:r>
+            <a:endParaRPr lang="en-US" sz="1450" dirty="0"/>
           </a:p>
         </p:txBody>
       </p:sp>
@@ -10534,7 +10517,7 @@
               <a:buNone/>
             </a:pPr>
             <a:r>
-              <a:rPr lang="en-US" sz="1100" dirty="0">
+              <a:rPr lang="en-US" sz="1030" dirty="0">
                 <a:solidFill>
                   <a:srgbClr val="172B3A"/>
                 </a:solidFill>
@@ -10542,9 +10525,9 @@
                 <a:ea typeface="Calibri" pitchFamily="34" charset="-122"/>
                 <a:cs typeface="Calibri" pitchFamily="34" charset="-120"/>
               </a:rPr>
-              <a:t>Ràng buộc (constraint) và chỉ mục được tạo trước khi nhập dữ liệu.</a:t>
-            </a:r>
-            <a:endParaRPr lang="en-US" sz="1100" dirty="0"/>
+              <a:t>Constraint ngăn trùng khóa; index giúp tìm node theo khóa hoặc tên.</a:t>
+            </a:r>
+            <a:endParaRPr lang="en-US" sz="1030" dirty="0"/>
           </a:p>
         </p:txBody>
       </p:sp>
@@ -10850,7 +10833,7 @@
                 <a:ea typeface="Calibri" pitchFamily="34" charset="-122"/>
                 <a:cs typeface="Calibri" pitchFamily="34" charset="-120"/>
               </a:rPr>
-              <a:t>Collect</a:t>
+              <a:t>Thu thập</a:t>
             </a:r>
             <a:endParaRPr lang="en-US" sz="1300" dirty="0"/>
           </a:p>
@@ -10949,7 +10932,7 @@
                 <a:ea typeface="Calibri" pitchFamily="34" charset="-122"/>
                 <a:cs typeface="Calibri" pitchFamily="34" charset="-120"/>
               </a:rPr>
-              <a:t>Cache</a:t>
+              <a:t>Lưu nguồn</a:t>
             </a:r>
             <a:endParaRPr lang="en-US" sz="1300" dirty="0"/>
           </a:p>
@@ -11048,7 +11031,7 @@
                 <a:ea typeface="Calibri" pitchFamily="34" charset="-122"/>
                 <a:cs typeface="Calibri" pitchFamily="34" charset="-120"/>
               </a:rPr>
-              <a:t>Clean</a:t>
+              <a:t>Làm sạch</a:t>
             </a:r>
             <a:endParaRPr lang="en-US" sz="1300" dirty="0"/>
           </a:p>
@@ -11147,7 +11130,7 @@
                 <a:ea typeface="Calibri" pitchFamily="34" charset="-122"/>
                 <a:cs typeface="Calibri" pitchFamily="34" charset="-120"/>
               </a:rPr>
-              <a:t>IMDb join</a:t>
+              <a:t>Nối IMDb</a:t>
             </a:r>
             <a:endParaRPr lang="en-US" sz="1300" dirty="0"/>
           </a:p>
@@ -11246,7 +11229,7 @@
                 <a:ea typeface="Calibri" pitchFamily="34" charset="-122"/>
                 <a:cs typeface="Calibri" pitchFamily="34" charset="-120"/>
               </a:rPr>
-              <a:t>Normalize</a:t>
+              <a:t>Chuẩn hóa</a:t>
             </a:r>
             <a:endParaRPr lang="en-US" sz="1300" dirty="0"/>
           </a:p>
@@ -11345,7 +11328,7 @@
                 <a:ea typeface="Calibri" pitchFamily="34" charset="-122"/>
                 <a:cs typeface="Calibri" pitchFamily="34" charset="-120"/>
               </a:rPr>
-              <a:t>Neo4j load</a:t>
+              <a:t>Nhập Neo4j</a:t>
             </a:r>
             <a:endParaRPr lang="en-US" sz="1300" dirty="0"/>
           </a:p>
@@ -11444,7 +11427,7 @@
                 <a:ea typeface="Calibri" pitchFamily="34" charset="-122"/>
                 <a:cs typeface="Calibri" pitchFamily="34" charset="-120"/>
               </a:rPr>
-              <a:t>Reason</a:t>
+              <a:t>Suy diễn</a:t>
             </a:r>
             <a:endParaRPr lang="en-US" sz="1300" dirty="0"/>
           </a:p>
@@ -11543,7 +11526,7 @@
                 <a:ea typeface="Calibri" pitchFamily="34" charset="-122"/>
                 <a:cs typeface="Calibri" pitchFamily="34" charset="-120"/>
               </a:rPr>
-              <a:t>Validate</a:t>
+              <a:t>Kiểm tra</a:t>
             </a:r>
             <a:endParaRPr lang="en-US" sz="1300" dirty="0"/>
           </a:p>
@@ -11557,12 +11540,12 @@
         </p:nvSpPr>
         <p:spPr>
           <a:xfrm>
-            <a:off x="621792" y="5074920"/>
-            <a:ext cx="2487168" cy="1005840"/>
+            <a:off x="621792" y="4956048"/>
+            <a:ext cx="2487168" cy="1170432"/>
           </a:xfrm>
           <a:prstGeom prst="roundRect">
             <a:avLst>
-              <a:gd name="adj" fmla="val 5455"/>
+              <a:gd name="adj" fmla="val 4688"/>
             </a:avLst>
           </a:prstGeom>
           <a:solidFill>
@@ -11584,7 +11567,7 @@
         </p:nvSpPr>
         <p:spPr>
           <a:xfrm>
-            <a:off x="850392" y="5257800"/>
+            <a:off x="850392" y="5138928"/>
             <a:ext cx="2029968" cy="301752"/>
           </a:xfrm>
           <a:prstGeom prst="rect">
@@ -11603,7 +11586,7 @@
               <a:buNone/>
             </a:pPr>
             <a:r>
-              <a:rPr lang="en-US" sz="1200" b="1" dirty="0">
+              <a:rPr lang="en-US" sz="1150" b="1" dirty="0">
                 <a:solidFill>
                   <a:srgbClr val="112B46"/>
                 </a:solidFill>
@@ -11611,9 +11594,9 @@
                 <a:ea typeface="Calibri" pitchFamily="34" charset="-122"/>
                 <a:cs typeface="Calibri" pitchFamily="34" charset="-120"/>
               </a:rPr>
-              <a:t>Cache</a:t>
-            </a:r>
-            <a:endParaRPr lang="en-US" sz="1200" dirty="0"/>
+              <a:t>Bộ nhớ đệm nguồn</a:t>
+            </a:r>
+            <a:endParaRPr lang="en-US" sz="1150" dirty="0"/>
           </a:p>
         </p:txBody>
       </p:sp>
@@ -11625,8 +11608,8 @@
         </p:nvSpPr>
         <p:spPr>
           <a:xfrm>
-            <a:off x="850392" y="5678424"/>
-            <a:ext cx="2029968" cy="219456"/>
+            <a:off x="850392" y="5559552"/>
+            <a:ext cx="2029968" cy="384048"/>
           </a:xfrm>
           <a:prstGeom prst="rect">
             <a:avLst/>
@@ -11644,7 +11627,7 @@
               <a:buNone/>
             </a:pPr>
             <a:r>
-              <a:rPr lang="en-US" sz="950" dirty="0">
+              <a:rPr lang="en-US" sz="870" dirty="0">
                 <a:solidFill>
                   <a:srgbClr val="172B3A"/>
                 </a:solidFill>
@@ -11652,9 +11635,9 @@
                 <a:ea typeface="Calibri" pitchFamily="34" charset="-122"/>
                 <a:cs typeface="Calibri" pitchFamily="34" charset="-120"/>
               </a:rPr>
-              <a:t>Không tải lại nguồn khi xử lý lại</a:t>
-            </a:r>
-            <a:endParaRPr lang="en-US" sz="950" dirty="0"/>
+              <a:t>Giữ nguyên dữ liệu gốc để có thể xử lý lại cùng một snapshot.</a:t>
+            </a:r>
+            <a:endParaRPr lang="en-US" sz="870" dirty="0"/>
           </a:p>
         </p:txBody>
       </p:sp>
@@ -11666,12 +11649,12 @@
         </p:nvSpPr>
         <p:spPr>
           <a:xfrm>
-            <a:off x="3392424" y="5074920"/>
-            <a:ext cx="2487168" cy="1005840"/>
+            <a:off x="3392424" y="4956048"/>
+            <a:ext cx="2487168" cy="1170432"/>
           </a:xfrm>
           <a:prstGeom prst="roundRect">
             <a:avLst>
-              <a:gd name="adj" fmla="val 5455"/>
+              <a:gd name="adj" fmla="val 4688"/>
             </a:avLst>
           </a:prstGeom>
           <a:solidFill>
@@ -11693,7 +11676,7 @@
         </p:nvSpPr>
         <p:spPr>
           <a:xfrm>
-            <a:off x="3621024" y="5257800"/>
+            <a:off x="3621024" y="5138928"/>
             <a:ext cx="2029968" cy="301752"/>
           </a:xfrm>
           <a:prstGeom prst="rect">
@@ -11712,7 +11695,7 @@
               <a:buNone/>
             </a:pPr>
             <a:r>
-              <a:rPr lang="en-US" sz="1200" b="1" dirty="0">
+              <a:rPr lang="en-US" sz="1150" b="1" dirty="0">
                 <a:solidFill>
                   <a:srgbClr val="112B46"/>
                 </a:solidFill>
@@ -11720,9 +11703,9 @@
                 <a:ea typeface="Calibri" pitchFamily="34" charset="-122"/>
                 <a:cs typeface="Calibri" pitchFamily="34" charset="-120"/>
               </a:rPr>
-              <a:t>Manifest</a:t>
-            </a:r>
-            <a:endParaRPr lang="en-US" sz="1200" dirty="0"/>
+              <a:t>Manifest thực nghiệm</a:t>
+            </a:r>
+            <a:endParaRPr lang="en-US" sz="1150" dirty="0"/>
           </a:p>
         </p:txBody>
       </p:sp>
@@ -11734,8 +11717,8 @@
         </p:nvSpPr>
         <p:spPr>
           <a:xfrm>
-            <a:off x="3621024" y="5678424"/>
-            <a:ext cx="2029968" cy="219456"/>
+            <a:off x="3621024" y="5559552"/>
+            <a:ext cx="2029968" cy="384048"/>
           </a:xfrm>
           <a:prstGeom prst="rect">
             <a:avLst/>
@@ -11753,7 +11736,7 @@
               <a:buNone/>
             </a:pPr>
             <a:r>
-              <a:rPr lang="en-US" sz="950" dirty="0">
+              <a:rPr lang="en-US" sz="870" dirty="0">
                 <a:solidFill>
                   <a:srgbClr val="172B3A"/>
                 </a:solidFill>
@@ -11761,9 +11744,9 @@
                 <a:ea typeface="Calibri" pitchFamily="34" charset="-122"/>
                 <a:cs typeface="Calibri" pitchFamily="34" charset="-120"/>
               </a:rPr>
-              <a:t>Count + checksum + chất lượng</a:t>
-            </a:r>
-            <a:endParaRPr lang="en-US" sz="950" dirty="0"/>
+              <a:t>Ghi số lượng, checksum và kết quả kiểm tra của mỗi lần chạy.</a:t>
+            </a:r>
+            <a:endParaRPr lang="en-US" sz="870" dirty="0"/>
           </a:p>
         </p:txBody>
       </p:sp>
@@ -11775,12 +11758,12 @@
         </p:nvSpPr>
         <p:spPr>
           <a:xfrm>
-            <a:off x="6163056" y="5074920"/>
-            <a:ext cx="2487168" cy="1005840"/>
+            <a:off x="6163056" y="4956048"/>
+            <a:ext cx="2487168" cy="1170432"/>
           </a:xfrm>
           <a:prstGeom prst="roundRect">
             <a:avLst>
-              <a:gd name="adj" fmla="val 5455"/>
+              <a:gd name="adj" fmla="val 4688"/>
             </a:avLst>
           </a:prstGeom>
           <a:solidFill>
@@ -11802,7 +11785,7 @@
         </p:nvSpPr>
         <p:spPr>
           <a:xfrm>
-            <a:off x="6391656" y="5257800"/>
+            <a:off x="6391656" y="5138928"/>
             <a:ext cx="2029968" cy="301752"/>
           </a:xfrm>
           <a:prstGeom prst="rect">
@@ -11821,7 +11804,7 @@
               <a:buNone/>
             </a:pPr>
             <a:r>
-              <a:rPr lang="en-US" sz="1200" b="1" dirty="0">
+              <a:rPr lang="en-US" sz="1150" b="1" dirty="0">
                 <a:solidFill>
                   <a:srgbClr val="112B46"/>
                 </a:solidFill>
@@ -11829,9 +11812,9 @@
                 <a:ea typeface="Calibri" pitchFamily="34" charset="-122"/>
                 <a:cs typeface="Calibri" pitchFamily="34" charset="-120"/>
               </a:rPr>
-              <a:t>MERGE</a:t>
-            </a:r>
-            <a:endParaRPr lang="en-US" sz="1200" dirty="0"/>
+              <a:t>Nhập idempotent</a:t>
+            </a:r>
+            <a:endParaRPr lang="en-US" sz="1150" dirty="0"/>
           </a:p>
         </p:txBody>
       </p:sp>
@@ -11843,8 +11826,8 @@
         </p:nvSpPr>
         <p:spPr>
           <a:xfrm>
-            <a:off x="6391656" y="5678424"/>
-            <a:ext cx="2029968" cy="219456"/>
+            <a:off x="6391656" y="5559552"/>
+            <a:ext cx="2029968" cy="384048"/>
           </a:xfrm>
           <a:prstGeom prst="rect">
             <a:avLst/>
@@ -11862,7 +11845,7 @@
               <a:buNone/>
             </a:pPr>
             <a:r>
-              <a:rPr lang="en-US" sz="950" dirty="0">
+              <a:rPr lang="en-US" sz="870" dirty="0">
                 <a:solidFill>
                   <a:srgbClr val="172B3A"/>
                 </a:solidFill>
@@ -11870,9 +11853,9 @@
                 <a:ea typeface="Calibri" pitchFamily="34" charset="-122"/>
                 <a:cs typeface="Calibri" pitchFamily="34" charset="-120"/>
               </a:rPr>
-              <a:t>Import lặp không nhân bản</a:t>
-            </a:r>
-            <a:endParaRPr lang="en-US" sz="950" dirty="0"/>
+              <a:t>`MERGE` theo stable ID giúp chạy lại mà không nhân bản node và cạnh.</a:t>
+            </a:r>
+            <a:endParaRPr lang="en-US" sz="870" dirty="0"/>
           </a:p>
         </p:txBody>
       </p:sp>
@@ -11884,12 +11867,12 @@
         </p:nvSpPr>
         <p:spPr>
           <a:xfrm>
-            <a:off x="8933688" y="5074920"/>
-            <a:ext cx="2487168" cy="1005840"/>
+            <a:off x="8933688" y="4956048"/>
+            <a:ext cx="2487168" cy="1170432"/>
           </a:xfrm>
           <a:prstGeom prst="roundRect">
             <a:avLst>
-              <a:gd name="adj" fmla="val 5455"/>
+              <a:gd name="adj" fmla="val 4688"/>
             </a:avLst>
           </a:prstGeom>
           <a:solidFill>
@@ -11911,7 +11894,7 @@
         </p:nvSpPr>
         <p:spPr>
           <a:xfrm>
-            <a:off x="9162288" y="5257800"/>
+            <a:off x="9162288" y="5138928"/>
             <a:ext cx="2029968" cy="301752"/>
           </a:xfrm>
           <a:prstGeom prst="rect">
@@ -11930,7 +11913,7 @@
               <a:buNone/>
             </a:pPr>
             <a:r>
-              <a:rPr lang="en-US" sz="1200" b="1" dirty="0">
+              <a:rPr lang="en-US" sz="1150" b="1" dirty="0">
                 <a:solidFill>
                   <a:srgbClr val="112B46"/>
                 </a:solidFill>
@@ -11938,9 +11921,9 @@
                 <a:ea typeface="Calibri" pitchFamily="34" charset="-122"/>
                 <a:cs typeface="Calibri" pitchFamily="34" charset="-120"/>
               </a:rPr>
-              <a:t>Gate</a:t>
-            </a:r>
-            <a:endParaRPr lang="en-US" sz="1200" dirty="0"/>
+              <a:t>Cổng chất lượng</a:t>
+            </a:r>
+            <a:endParaRPr lang="en-US" sz="1150" dirty="0"/>
           </a:p>
         </p:txBody>
       </p:sp>
@@ -11952,8 +11935,8 @@
         </p:nvSpPr>
         <p:spPr>
           <a:xfrm>
-            <a:off x="9162288" y="5678424"/>
-            <a:ext cx="2029968" cy="219456"/>
+            <a:off x="9162288" y="5559552"/>
+            <a:ext cx="2029968" cy="384048"/>
           </a:xfrm>
           <a:prstGeom prst="rect">
             <a:avLst/>
@@ -11971,7 +11954,7 @@
               <a:buNone/>
             </a:pPr>
             <a:r>
-              <a:rPr lang="en-US" sz="950" dirty="0">
+              <a:rPr lang="en-US" sz="870" dirty="0">
                 <a:solidFill>
                   <a:srgbClr val="172B3A"/>
                 </a:solidFill>
@@ -11979,9 +11962,9 @@
                 <a:ea typeface="Calibri" pitchFamily="34" charset="-122"/>
                 <a:cs typeface="Calibri" pitchFamily="34" charset="-120"/>
               </a:rPr>
-              <a:t>Phát hiện orphan và khóa lỗi</a:t>
-            </a:r>
-            <a:endParaRPr lang="en-US" sz="950" dirty="0"/>
+              <a:t>Chặn dữ liệu mồ côi, thiếu khóa hoặc có cạnh không hợp lệ.</a:t>
+            </a:r>
+            <a:endParaRPr lang="en-US" sz="870" dirty="0"/>
           </a:p>
         </p:txBody>
       </p:sp>
@@ -16895,7 +16878,7 @@
               <a:buNone/>
             </a:pPr>
             <a:r>
-              <a:rPr lang="en-US" sz="1150" dirty="0">
+              <a:rPr lang="en-US" sz="1080" dirty="0">
                 <a:solidFill>
                   <a:srgbClr val="172B3A"/>
                 </a:solidFill>
@@ -16903,9 +16886,9 @@
                 <a:ea typeface="Calibri" pitchFamily="34" charset="-122"/>
                 <a:cs typeface="Calibri" pitchFamily="34" charset="-120"/>
               </a:rPr>
-              <a:t>ACTED_IN đến từ danh sách vai diễn của TMDB.</a:t>
-            </a:r>
-            <a:endParaRPr lang="en-US" sz="1150" dirty="0"/>
+              <a:t>Cạnh ACTED_IN được nhập trực tiếp từ danh sách vai diễn của TMDB.</a:t>
+            </a:r>
+            <a:endParaRPr lang="en-US" sz="1080" dirty="0"/>
           </a:p>
         </p:txBody>
       </p:sp>
@@ -16978,7 +16961,7 @@
                 <a:ea typeface="Calibri" pitchFamily="34" charset="-122"/>
                 <a:cs typeface="Calibri" pitchFamily="34" charset="-120"/>
               </a:rPr>
-              <a:t>Sự kiện suy ra</a:t>
+              <a:t>Sự kiện được suy ra</a:t>
             </a:r>
             <a:endParaRPr lang="en-US" sz="1600" dirty="0"/>
           </a:p>
@@ -17011,7 +16994,7 @@
               <a:buNone/>
             </a:pPr>
             <a:r>
-              <a:rPr lang="en-US" sz="1150" dirty="0">
+              <a:rPr lang="en-US" sz="1050" dirty="0">
                 <a:solidFill>
                   <a:srgbClr val="172B3A"/>
                 </a:solidFill>
@@ -17019,9 +17002,9 @@
                 <a:ea typeface="Calibri" pitchFamily="34" charset="-122"/>
                 <a:cs typeface="Calibri" pitchFamily="34" charset="-120"/>
               </a:rPr>
-              <a:t>CO_STARRED_WITH được tạo từ phim chung.</a:t>
-            </a:r>
-            <a:endParaRPr lang="en-US" sz="1150" dirty="0"/>
+              <a:t>Nếu hai Person cùng ACTED_IN một Movie, hệ thống tạo quan hệ CO_STARRED_WITH.</a:t>
+            </a:r>
+            <a:endParaRPr lang="en-US" sz="1050" dirty="0"/>
           </a:p>
         </p:txBody>
       </p:sp>
@@ -17094,7 +17077,7 @@
                 <a:ea typeface="Calibri" pitchFamily="34" charset="-122"/>
                 <a:cs typeface="Calibri" pitchFamily="34" charset="-120"/>
               </a:rPr>
-              <a:t>Bằng chứng</a:t>
+              <a:t>Vì sao kết quả kiểm chứng được?</a:t>
             </a:r>
             <a:endParaRPr lang="en-US" sz="1600" dirty="0"/>
           </a:p>
@@ -17127,7 +17110,7 @@
               <a:buNone/>
             </a:pPr>
             <a:r>
-              <a:rPr lang="en-US" sz="1200" dirty="0">
+              <a:rPr lang="en-US" sz="1050" dirty="0">
                 <a:solidFill>
                   <a:srgbClr val="172B3A"/>
                 </a:solidFill>
@@ -17135,9 +17118,9 @@
                 <a:ea typeface="Calibri" pitchFamily="34" charset="-122"/>
                 <a:cs typeface="Calibri" pitchFamily="34" charset="-120"/>
               </a:rPr>
-              <a:t>movie_count · evidence_movie_ids · derived=true</a:t>
-            </a:r>
-            <a:endParaRPr lang="en-US" sz="1200" dirty="0"/>
+              <a:t>Cạnh suy ra lưu số phim chung, ID các phim làm bằng chứng và cờ `derived=true`.</a:t>
+            </a:r>
+            <a:endParaRPr lang="en-US" sz="1050" dirty="0"/>
           </a:p>
         </p:txBody>
       </p:sp>
@@ -17327,7 +17310,7 @@
                 <a:ea typeface="Calibri" pitchFamily="34" charset="-122"/>
                 <a:cs typeface="Calibri" pitchFamily="34" charset="-120"/>
               </a:rPr>
-              <a:t>Provenance, lineage và evidence không hoàn toàn giống nhau</a:t>
+              <a:t>Nguồn gốc, lịch sử biến đổi và bằng chứng trả lời ba câu hỏi khác nhau</a:t>
             </a:r>
             <a:endParaRPr lang="en-US" sz="2600" dirty="0"/>
           </a:p>
@@ -17368,7 +17351,7 @@
                 <a:ea typeface="Calibri" pitchFamily="34" charset="-122"/>
                 <a:cs typeface="Calibri" pitchFamily="34" charset="-120"/>
               </a:rPr>
-              <a:t>Ba khái niệm cùng hỗ trợ kiểm chứng nhưng trả lời ba câu hỏi khác nhau.</a:t>
+              <a:t>Phân biệt rõ ba lớp truy vết giúp giải thích được cả dữ liệu gốc, dữ liệu suy ra và kết quả ứng dụng.</a:t>
             </a:r>
             <a:endParaRPr lang="en-US" sz="1250" dirty="0"/>
           </a:p>
@@ -17625,7 +17608,7 @@
                           <a:ea typeface="Calibri" pitchFamily="34" charset="-122"/>
                           <a:cs typeface="Calibri" pitchFamily="34" charset="-120"/>
                         </a:rPr>
-                        <a:t>Provenance</a:t>
+                        <a:t>Nguồn gốc (provenance)</a:t>
                       </a:r>
                       <a:endParaRPr lang="en-US" sz="1300" dirty="0">
                         <a:latin typeface="Calibri" charset="0"/>
@@ -17693,7 +17676,7 @@
                           <a:ea typeface="Calibri" pitchFamily="34" charset="-122"/>
                           <a:cs typeface="Calibri" pitchFamily="34" charset="-120"/>
                         </a:rPr>
-                        <a:t>Fact đến từ nguồn nào?</a:t>
+                        <a:t>Sự kiện đến từ nguồn nào?</a:t>
                       </a:r>
                       <a:endParaRPr lang="en-US" sz="1300" dirty="0">
                         <a:latin typeface="Calibri" charset="0"/>
@@ -17761,7 +17744,7 @@
                           <a:ea typeface="Calibri" pitchFamily="34" charset="-122"/>
                           <a:cs typeface="Calibri" pitchFamily="34" charset="-120"/>
                         </a:rPr>
-                        <a:t>`source=tmdb`; checksum IMDb; source ID</a:t>
+                        <a:t>`source=tmdb`; checksum IMDb; ID của nguồn</a:t>
                       </a:r>
                       <a:endParaRPr lang="en-US" sz="1300" dirty="0">
                         <a:latin typeface="Calibri" charset="0"/>
@@ -17831,7 +17814,7 @@
                           <a:ea typeface="Calibri" pitchFamily="34" charset="-122"/>
                           <a:cs typeface="Calibri" pitchFamily="34" charset="-120"/>
                         </a:rPr>
-                        <a:t>Lineage</a:t>
+                        <a:t>Lịch sử biến đổi (lineage)</a:t>
                       </a:r>
                       <a:endParaRPr lang="en-US" sz="1300" dirty="0">
                         <a:latin typeface="Calibri" charset="0"/>
@@ -17899,7 +17882,7 @@
                           <a:ea typeface="Calibri" pitchFamily="34" charset="-122"/>
                           <a:cs typeface="Calibri" pitchFamily="34" charset="-120"/>
                         </a:rPr>
-                        <a:t>Fact đã đi qua biến đổi nào?</a:t>
+                        <a:t>Sự kiện đã đi qua các bước nào?</a:t>
                       </a:r>
                       <a:endParaRPr lang="en-US" sz="1300" dirty="0">
                         <a:latin typeface="Calibri" charset="0"/>
@@ -17967,7 +17950,7 @@
                           <a:ea typeface="Calibri" pitchFamily="34" charset="-122"/>
                           <a:cs typeface="Calibri" pitchFamily="34" charset="-120"/>
                         </a:rPr>
-                        <a:t>raw cache → clean → CSV → import → rule</a:t>
+                        <a:t>dữ liệu gốc → làm sạch → CSV → nhập → luật</a:t>
                       </a:r>
                       <a:endParaRPr lang="en-US" sz="1300" dirty="0">
                         <a:latin typeface="Calibri" charset="0"/>
@@ -18037,7 +18020,7 @@
                           <a:ea typeface="Calibri" pitchFamily="34" charset="-122"/>
                           <a:cs typeface="Calibri" pitchFamily="34" charset="-120"/>
                         </a:rPr>
-                        <a:t>Evidence</a:t>
+                        <a:t>Bằng chứng (evidence)</a:t>
                       </a:r>
                       <a:endParaRPr lang="en-US" sz="1300" dirty="0">
                         <a:latin typeface="Calibri" charset="0"/>
@@ -18105,7 +18088,7 @@
                           <a:ea typeface="Calibri" pitchFamily="34" charset="-122"/>
                           <a:cs typeface="Calibri" pitchFamily="34" charset="-120"/>
                         </a:rPr>
-                        <a:t>Kết quả này dựa trên node/edge nào?</a:t>
+                        <a:t>Kết quả này dựa trên node và cạnh nào?</a:t>
                       </a:r>
                       <a:endParaRPr lang="en-US" sz="1300" dirty="0">
                         <a:latin typeface="Calibri" charset="0"/>
@@ -18173,7 +18156,7 @@
                           <a:ea typeface="Calibri" pitchFamily="34" charset="-122"/>
                           <a:cs typeface="Calibri" pitchFamily="34" charset="-120"/>
                         </a:rPr>
-                        <a:t>entity link; graph row/path; shared feature</a:t>
+                        <a:t>thực thể đã nối; bản ghi/đường đi; đặc trưng chung</a:t>
                       </a:r>
                       <a:endParaRPr lang="en-US" sz="1300" dirty="0">
                         <a:latin typeface="Calibri" charset="0"/>
@@ -18362,7 +18345,7 @@
                 <a:ea typeface="Calibri" pitchFamily="34" charset="-122"/>
                 <a:cs typeface="Calibri" pitchFamily="34" charset="-120"/>
               </a:rPr>
-              <a:t>Asserted fact</a:t>
+              <a:t>Sự kiện được khẳng định</a:t>
             </a:r>
             <a:endParaRPr lang="en-US" sz="1600" dirty="0"/>
           </a:p>
@@ -18395,7 +18378,7 @@
               <a:buNone/>
             </a:pPr>
             <a:r>
-              <a:rPr lang="en-US" sz="1150" dirty="0">
+              <a:rPr lang="en-US" sz="1120" dirty="0">
                 <a:solidFill>
                   <a:srgbClr val="172B3A"/>
                 </a:solidFill>
@@ -18403,9 +18386,9 @@
                 <a:ea typeface="Calibri" pitchFamily="34" charset="-122"/>
                 <a:cs typeface="Calibri" pitchFamily="34" charset="-120"/>
               </a:rPr>
-              <a:t>Fact lấy trực tiếp từ nguồn, ví dụ Person ACTED_IN Movie.</a:t>
-            </a:r>
-            <a:endParaRPr lang="en-US" sz="1150" dirty="0"/>
+              <a:t>Được lấy trực tiếp từ nguồn, ví dụ Person ACTED_IN Movie; cần giữ nguồn và ID gốc.</a:t>
+            </a:r>
+            <a:endParaRPr lang="en-US" sz="1120" dirty="0"/>
           </a:p>
         </p:txBody>
       </p:sp>
@@ -18542,7 +18525,7 @@
                 <a:ea typeface="Calibri" pitchFamily="34" charset="-122"/>
                 <a:cs typeface="Calibri" pitchFamily="34" charset="-120"/>
               </a:rPr>
-              <a:t>Derived fact</a:t>
+              <a:t>Sự kiện được suy ra</a:t>
             </a:r>
             <a:endParaRPr lang="en-US" sz="1600" dirty="0"/>
           </a:p>
@@ -18575,7 +18558,7 @@
               <a:buNone/>
             </a:pPr>
             <a:r>
-              <a:rPr lang="en-US" sz="1150" dirty="0">
+              <a:rPr lang="en-US" sz="1120" dirty="0">
                 <a:solidFill>
                   <a:srgbClr val="172B3A"/>
                 </a:solidFill>
@@ -18583,9 +18566,9 @@
                 <a:ea typeface="Calibri" pitchFamily="34" charset="-122"/>
                 <a:cs typeface="Calibri" pitchFamily="34" charset="-120"/>
               </a:rPr>
-              <a:t>Fact sinh bởi luật, ví dụ CO_STARRED_WITH; phải đánh dấu derived.</a:t>
-            </a:r>
-            <a:endParaRPr lang="en-US" sz="1150" dirty="0"/>
+              <a:t>Được sinh bởi luật, ví dụ CO_STARRED_WITH; cần giữ luật và các phim làm căn cứ.</a:t>
+            </a:r>
+            <a:endParaRPr lang="en-US" sz="1120" dirty="0"/>
           </a:p>
         </p:txBody>
       </p:sp>
@@ -18722,7 +18705,7 @@
                 <a:ea typeface="Calibri" pitchFamily="34" charset="-122"/>
                 <a:cs typeface="Calibri" pitchFamily="34" charset="-120"/>
               </a:rPr>
-              <a:t>Explainable result</a:t>
+              <a:t>Kết quả giải thích được</a:t>
             </a:r>
             <a:endParaRPr lang="en-US" sz="1600" dirty="0"/>
           </a:p>
@@ -18755,7 +18738,7 @@
               <a:buNone/>
             </a:pPr>
             <a:r>
-              <a:rPr lang="en-US" sz="1150" dirty="0">
+              <a:rPr lang="en-US" sz="1120" dirty="0">
                 <a:solidFill>
                   <a:srgbClr val="172B3A"/>
                 </a:solidFill>
@@ -18763,9 +18746,9 @@
                 <a:ea typeface="Calibri" pitchFamily="34" charset="-122"/>
                 <a:cs typeface="Calibri" pitchFamily="34" charset="-120"/>
               </a:rPr>
-              <a:t>Kết quả kèm path hoặc feature đủ để người dùng kiểm tra ngược.</a:t>
-            </a:r>
-            <a:endParaRPr lang="en-US" sz="1150" dirty="0"/>
+              <a:t>Kèm đường đi hoặc đặc trưng đóng góp đủ để người dùng kiểm tra ngược cách tạo kết quả.</a:t>
+            </a:r>
+            <a:endParaRPr lang="en-US" sz="1120" dirty="0"/>
           </a:p>
         </p:txBody>
       </p:sp>
@@ -19082,7 +19065,7 @@
               <a:buNone/>
             </a:pPr>
             <a:r>
-              <a:rPr lang="en-US" sz="1500" b="1" dirty="0">
+              <a:rPr lang="en-US" sz="1420" b="1" dirty="0">
                 <a:solidFill>
                   <a:srgbClr val="112B46"/>
                 </a:solidFill>
@@ -19090,9 +19073,9 @@
                 <a:ea typeface="Calibri" pitchFamily="34" charset="-122"/>
                 <a:cs typeface="Calibri" pitchFamily="34" charset="-120"/>
               </a:rPr>
-              <a:t>9 ý định cố định</a:t>
-            </a:r>
-            <a:endParaRPr lang="en-US" sz="1500" dirty="0"/>
+              <a:t>Giới hạn ở chín loại câu hỏi</a:t>
+            </a:r>
+            <a:endParaRPr lang="en-US" sz="1420" dirty="0"/>
           </a:p>
         </p:txBody>
       </p:sp>
@@ -19123,7 +19106,7 @@
               <a:buNone/>
             </a:pPr>
             <a:r>
-              <a:rPr lang="en-US" sz="1050" dirty="0">
+              <a:rPr lang="en-US" sz="970" dirty="0">
                 <a:solidFill>
                   <a:srgbClr val="172B3A"/>
                 </a:solidFill>
@@ -19131,9 +19114,9 @@
                 <a:ea typeface="Calibri" pitchFamily="34" charset="-122"/>
                 <a:cs typeface="Calibri" pitchFamily="34" charset="-120"/>
               </a:rPr>
-              <a:t>Tra cứu · tổng hợp · nhiều bước · đường đi ngắn nhất</a:t>
-            </a:r>
-            <a:endParaRPr lang="en-US" sz="1050" dirty="0"/>
+              <a:t>Mỗi intent ánh xạ tới một mẫu Cypher cố định; câu ngoài phạm vi được trả về là chưa hỗ trợ.</a:t>
+            </a:r>
+            <a:endParaRPr lang="en-US" sz="970" dirty="0"/>
           </a:p>
         </p:txBody>
       </p:sp>
@@ -19198,7 +19181,7 @@
               <a:buNone/>
             </a:pPr>
             <a:r>
-              <a:rPr lang="en-US" sz="1500" b="1" dirty="0">
+              <a:rPr lang="en-US" sz="1420" b="1" dirty="0">
                 <a:solidFill>
                   <a:srgbClr val="112B46"/>
                 </a:solidFill>
@@ -19206,9 +19189,9 @@
                 <a:ea typeface="Calibri" pitchFamily="34" charset="-122"/>
                 <a:cs typeface="Calibri" pitchFamily="34" charset="-120"/>
               </a:rPr>
-              <a:t>Liên kết thực thể</a:t>
-            </a:r>
-            <a:endParaRPr lang="en-US" sz="1500" dirty="0"/>
+              <a:t>Tên gọi được nối tới node chuẩn</a:t>
+            </a:r>
+            <a:endParaRPr lang="en-US" sz="1420" dirty="0"/>
           </a:p>
         </p:txBody>
       </p:sp>
@@ -19239,7 +19222,7 @@
               <a:buNone/>
             </a:pPr>
             <a:r>
-              <a:rPr lang="en-US" sz="1050" dirty="0">
+              <a:rPr lang="en-US" sz="970" dirty="0">
                 <a:solidFill>
                   <a:srgbClr val="172B3A"/>
                 </a:solidFill>
@@ -19247,9 +19230,9 @@
                 <a:ea typeface="Calibri" pitchFamily="34" charset="-122"/>
                 <a:cs typeface="Calibri" pitchFamily="34" charset="-120"/>
               </a:rPr>
-              <a:t>“Cristopher Nolan” → Christopher Nolan + độ tin cậy</a:t>
-            </a:r>
-            <a:endParaRPr lang="en-US" sz="1050" dirty="0"/>
+              <a:t>Ví dụ “Cristopher Nolan” được liên kết tới Christopher Nolan cùng stable ID và độ tin cậy.</a:t>
+            </a:r>
+            <a:endParaRPr lang="en-US" sz="970" dirty="0"/>
           </a:p>
         </p:txBody>
       </p:sp>
@@ -19314,7 +19297,7 @@
               <a:buNone/>
             </a:pPr>
             <a:r>
-              <a:rPr lang="en-US" sz="1500" b="1" dirty="0">
+              <a:rPr lang="en-US" sz="1420" b="1" dirty="0">
                 <a:solidFill>
                   <a:srgbClr val="112B46"/>
                 </a:solidFill>
@@ -19322,9 +19305,9 @@
                 <a:ea typeface="Calibri" pitchFamily="34" charset="-122"/>
                 <a:cs typeface="Calibri" pitchFamily="34" charset="-120"/>
               </a:rPr>
-              <a:t>Bằng chứng đồ thị</a:t>
-            </a:r>
-            <a:endParaRPr lang="en-US" sz="1500" dirty="0"/>
+              <a:t>Câu trả lời đi kèm căn cứ</a:t>
+            </a:r>
+            <a:endParaRPr lang="en-US" sz="1420" dirty="0"/>
           </a:p>
         </p:txBody>
       </p:sp>
@@ -19355,7 +19338,7 @@
               <a:buNone/>
             </a:pPr>
             <a:r>
-              <a:rPr lang="en-US" sz="1050" dirty="0">
+              <a:rPr lang="en-US" sz="970" dirty="0">
                 <a:solidFill>
                   <a:srgbClr val="172B3A"/>
                 </a:solidFill>
@@ -19363,9 +19346,9 @@
                 <a:ea typeface="Calibri" pitchFamily="34" charset="-122"/>
                 <a:cs typeface="Calibri" pitchFamily="34" charset="-120"/>
               </a:rPr>
-              <a:t>Ý định · thực thể · bản ghi/đường đi · độ trễ</a:t>
-            </a:r>
-            <a:endParaRPr lang="en-US" sz="1050" dirty="0"/>
+              <a:t>Phản hồi giữ intent, thực thể đã liên kết và bản ghi hoặc đường đi dùng để tạo câu trả lời.</a:t>
+            </a:r>
+            <a:endParaRPr lang="en-US" sz="970" dirty="0"/>
           </a:p>
         </p:txBody>
       </p:sp>
@@ -20175,7 +20158,7 @@
                 <a:ea typeface="Calibri" pitchFamily="34" charset="-122"/>
                 <a:cs typeface="Calibri" pitchFamily="34" charset="-120"/>
               </a:rPr>
-              <a:t>Điểm được tính trong Neo4j</a:t>
+              <a:t>Mỗi điểm số đều có lời giải thích</a:t>
             </a:r>
             <a:endParaRPr lang="en-US" sz="1200" dirty="0"/>
           </a:p>
@@ -20208,7 +20191,7 @@
               <a:buNone/>
             </a:pPr>
             <a:r>
-              <a:rPr lang="en-US" sz="950" dirty="0">
+              <a:rPr lang="en-US" sz="920" dirty="0">
                 <a:solidFill>
                   <a:srgbClr val="172B3A"/>
                 </a:solidFill>
@@ -20216,9 +20199,9 @@
                 <a:ea typeface="Calibri" pitchFamily="34" charset="-122"/>
                 <a:cs typeface="Calibri" pitchFamily="34" charset="-120"/>
               </a:rPr>
-              <a:t>Không tải toàn bộ graph về Python.</a:t>
-            </a:r>
-            <a:endParaRPr lang="en-US" sz="950" dirty="0"/>
+              <a:t>Neo4j trả cả tổng điểm và các đặc trưng chung đã đóng góp vào điểm đó.</a:t>
+            </a:r>
+            <a:endParaRPr lang="en-US" sz="920" dirty="0"/>
           </a:p>
         </p:txBody>
       </p:sp>
@@ -24380,7 +24363,7 @@
                 <a:ea typeface="Calibri" pitchFamily="34" charset="-122"/>
                 <a:cs typeface="Calibri" pitchFamily="34" charset="-120"/>
               </a:rPr>
-              <a:t>Cách đọc thận trọng</a:t>
+              <a:t>Ý nghĩa đúng của các con số</a:t>
             </a:r>
             <a:endParaRPr lang="en-US" sz="1700" dirty="0"/>
           </a:p>
@@ -24413,7 +24396,7 @@
               <a:buNone/>
             </a:pPr>
             <a:r>
-              <a:rPr lang="en-US" sz="1250" dirty="0">
+              <a:rPr lang="en-US" sz="1220" dirty="0">
                 <a:solidFill>
                   <a:srgbClr val="172B3A"/>
                 </a:solidFill>
@@ -24421,60 +24404,9 @@
                 <a:ea typeface="Calibri" pitchFamily="34" charset="-122"/>
                 <a:cs typeface="Calibri" pitchFamily="34" charset="-120"/>
               </a:rPr>
-              <a:t>• QA là smoke corpus được quản lý.</a:t>
-            </a:r>
-            <a:endParaRPr lang="en-US" sz="1250" dirty="0"/>
-          </a:p>
-          <a:p>
-            <a:pPr indent="0" marL="0">
-              <a:buNone/>
-            </a:pPr>
-            <a:r>
-              <a:rPr lang="en-US" sz="1250" dirty="0">
-                <a:solidFill>
-                  <a:srgbClr val="172B3A"/>
-                </a:solidFill>
-                <a:latin typeface="Calibri" pitchFamily="34" charset="0"/>
-                <a:ea typeface="Calibri" pitchFamily="34" charset="-122"/>
-                <a:cs typeface="Calibri" pitchFamily="34" charset="-120"/>
-              </a:rPr>
-              <a:t>• Entity precision cao nhờ abstention bảo thủ.</a:t>
-            </a:r>
-            <a:endParaRPr lang="en-US" sz="1250" dirty="0"/>
-          </a:p>
-          <a:p>
-            <a:pPr indent="0" marL="0">
-              <a:buNone/>
-            </a:pPr>
-            <a:r>
-              <a:rPr lang="en-US" sz="1250" dirty="0">
-                <a:solidFill>
-                  <a:srgbClr val="172B3A"/>
-                </a:solidFill>
-                <a:latin typeface="Calibri" pitchFamily="34" charset="0"/>
-                <a:ea typeface="Calibri" pitchFamily="34" charset="-122"/>
-                <a:cs typeface="Calibri" pitchFamily="34" charset="-120"/>
-              </a:rPr>
-              <a:t>• Recommendation là metric silver, chưa phải đánh giá người dùng.</a:t>
-            </a:r>
-            <a:endParaRPr lang="en-US" sz="1250" dirty="0"/>
-          </a:p>
-          <a:p>
-            <a:pPr indent="0" marL="0">
-              <a:buNone/>
-            </a:pPr>
-            <a:r>
-              <a:rPr lang="en-US" sz="1250" dirty="0">
-                <a:solidFill>
-                  <a:srgbClr val="172B3A"/>
-                </a:solidFill>
-                <a:latin typeface="Calibri" pitchFamily="34" charset="0"/>
-                <a:ea typeface="Calibri" pitchFamily="34" charset="-122"/>
-                <a:cs typeface="Calibri" pitchFamily="34" charset="-120"/>
-              </a:rPr>
-              <a:t>• Mọi output gợi ý đều có đường giải thích.</a:t>
-            </a:r>
-            <a:endParaRPr lang="en-US" sz="1250" dirty="0"/>
+              <a:t>QA 20/20 chứng minh luồng đã định hoạt động trên tập smoke test. Entity precision cao nhờ hệ thống chấp nhận bỏ sót khi mơ hồ. Chỉ số gợi ý đo trên corpus silver, vì vậy chưa thể thay cho đánh giá độc lập của người dùng.</a:t>
+            </a:r>
+            <a:endParaRPr lang="en-US" sz="1220" dirty="0"/>
           </a:p>
         </p:txBody>
       </p:sp>
@@ -26212,7 +26144,7 @@
               <a:buNone/>
             </a:pPr>
             <a:r>
-              <a:rPr lang="en-US" sz="1400" dirty="0">
+              <a:rPr lang="en-US" sz="1320" dirty="0">
                 <a:solidFill>
                   <a:srgbClr val="172B3A"/>
                 </a:solidFill>
@@ -26220,22 +26152,22 @@
                 <a:ea typeface="Calibri" pitchFamily="34" charset="-122"/>
                 <a:cs typeface="Calibri" pitchFamily="34" charset="-120"/>
               </a:rPr>
-              <a:t>Phim chung của Christian Bale và Tom Hardy?</a:t>
-            </a:r>
-            <a:endParaRPr lang="en-US" sz="1400" dirty="0"/>
-          </a:p>
-          <a:p>
-            <a:pPr indent="0" marL="0">
-              <a:buNone/>
-            </a:pPr>
-            <a:endParaRPr lang="en-US" sz="1400" dirty="0"/>
-          </a:p>
-          <a:p>
-            <a:pPr indent="0" marL="0">
-              <a:buNone/>
-            </a:pPr>
-            <a:r>
-              <a:rPr lang="en-US" sz="1400" dirty="0">
+              <a:t>“Christian Bale và Tom Hardy cùng đóng phim nào?”</a:t>
+            </a:r>
+            <a:endParaRPr lang="en-US" sz="1320" dirty="0"/>
+          </a:p>
+          <a:p>
+            <a:pPr indent="0" marL="0">
+              <a:buNone/>
+            </a:pPr>
+            <a:endParaRPr lang="en-US" sz="1320" dirty="0"/>
+          </a:p>
+          <a:p>
+            <a:pPr indent="0" marL="0">
+              <a:buNone/>
+            </a:pPr>
+            <a:r>
+              <a:rPr lang="en-US" sz="1320" dirty="0">
                 <a:solidFill>
                   <a:srgbClr val="172B3A"/>
                 </a:solidFill>
@@ -26243,16 +26175,16 @@
                 <a:ea typeface="Calibri" pitchFamily="34" charset="-122"/>
                 <a:cs typeface="Calibri" pitchFamily="34" charset="-120"/>
               </a:rPr>
-              <a:t>Quan sát:</a:t>
-            </a:r>
-            <a:endParaRPr lang="en-US" sz="1400" dirty="0"/>
-          </a:p>
-          <a:p>
-            <a:pPr indent="0" marL="0">
-              <a:buNone/>
-            </a:pPr>
-            <a:r>
-              <a:rPr lang="en-US" sz="1400" dirty="0">
+              <a:t>Từ câu hỏi, hệ thống phải xác định:</a:t>
+            </a:r>
+            <a:endParaRPr lang="en-US" sz="1320" dirty="0"/>
+          </a:p>
+          <a:p>
+            <a:pPr indent="0" marL="0">
+              <a:buNone/>
+            </a:pPr>
+            <a:r>
+              <a:rPr lang="en-US" sz="1320" dirty="0">
                 <a:solidFill>
                   <a:srgbClr val="172B3A"/>
                 </a:solidFill>
@@ -26260,16 +26192,16 @@
                 <a:ea typeface="Calibri" pitchFamily="34" charset="-122"/>
                 <a:cs typeface="Calibri" pitchFamily="34" charset="-120"/>
               </a:rPr>
-              <a:t>• hai thực thể Person</a:t>
-            </a:r>
-            <a:endParaRPr lang="en-US" sz="1400" dirty="0"/>
-          </a:p>
-          <a:p>
-            <a:pPr indent="0" marL="0">
-              <a:buNone/>
-            </a:pPr>
-            <a:r>
-              <a:rPr lang="en-US" sz="1400" dirty="0">
+              <a:t>• hai thực thể thuộc lớp Person;</a:t>
+            </a:r>
+            <a:endParaRPr lang="en-US" sz="1320" dirty="0"/>
+          </a:p>
+          <a:p>
+            <a:pPr indent="0" marL="0">
+              <a:buNone/>
+            </a:pPr>
+            <a:r>
+              <a:rPr lang="en-US" sz="1320" dirty="0">
                 <a:solidFill>
                   <a:srgbClr val="172B3A"/>
                 </a:solidFill>
@@ -26277,16 +26209,16 @@
                 <a:ea typeface="Calibri" pitchFamily="34" charset="-122"/>
                 <a:cs typeface="Calibri" pitchFamily="34" charset="-120"/>
               </a:rPr>
-              <a:t>• quan hệ ACTED_IN</a:t>
-            </a:r>
-            <a:endParaRPr lang="en-US" sz="1400" dirty="0"/>
-          </a:p>
-          <a:p>
-            <a:pPr indent="0" marL="0">
-              <a:buNone/>
-            </a:pPr>
-            <a:r>
-              <a:rPr lang="en-US" sz="1400" dirty="0">
+              <a:t>• quan hệ cần duyệt là ACTED_IN;</a:t>
+            </a:r>
+            <a:endParaRPr lang="en-US" sz="1320" dirty="0"/>
+          </a:p>
+          <a:p>
+            <a:pPr indent="0" marL="0">
+              <a:buNone/>
+            </a:pPr>
+            <a:r>
+              <a:rPr lang="en-US" sz="1320" dirty="0">
                 <a:solidFill>
                   <a:srgbClr val="172B3A"/>
                 </a:solidFill>
@@ -26294,16 +26226,16 @@
                 <a:ea typeface="Calibri" pitchFamily="34" charset="-122"/>
                 <a:cs typeface="Calibri" pitchFamily="34" charset="-120"/>
               </a:rPr>
-              <a:t>• một Movie dùng chung</a:t>
-            </a:r>
-            <a:endParaRPr lang="en-US" sz="1400" dirty="0"/>
-          </a:p>
-          <a:p>
-            <a:pPr indent="0" marL="0">
-              <a:buNone/>
-            </a:pPr>
-            <a:r>
-              <a:rPr lang="en-US" sz="1400" dirty="0">
+              <a:t>• Movie chung là node cần trả về;</a:t>
+            </a:r>
+            <a:endParaRPr lang="en-US" sz="1320" dirty="0"/>
+          </a:p>
+          <a:p>
+            <a:pPr indent="0" marL="0">
+              <a:buNone/>
+            </a:pPr>
+            <a:r>
+              <a:rPr lang="en-US" sz="1320" dirty="0">
                 <a:solidFill>
                   <a:srgbClr val="172B3A"/>
                 </a:solidFill>
@@ -26311,9 +26243,9 @@
                 <a:ea typeface="Calibri" pitchFamily="34" charset="-122"/>
                 <a:cs typeface="Calibri" pitchFamily="34" charset="-120"/>
               </a:rPr>
-              <a:t>• kết quả cần evidence</a:t>
-            </a:r>
-            <a:endParaRPr lang="en-US" sz="1400" dirty="0"/>
+              <a:t>• đường Person → Movie ← Person là bằng chứng.</a:t>
+            </a:r>
+            <a:endParaRPr lang="en-US" sz="1320" dirty="0"/>
           </a:p>
         </p:txBody>
       </p:sp>
@@ -27529,7 +27461,7 @@
                 <a:ea typeface="Calibri" pitchFamily="34" charset="-122"/>
                 <a:cs typeface="Calibri" pitchFamily="34" charset="-120"/>
               </a:rPr>
-              <a:t>Thuộc tính &amp; định danh</a:t>
+              <a:t>Thuộc tính và định danh</a:t>
             </a:r>
             <a:endParaRPr lang="en-US" sz="1600" dirty="0"/>
           </a:p>
@@ -27562,7 +27494,7 @@
               <a:buNone/>
             </a:pPr>
             <a:r>
-              <a:rPr lang="en-US" sz="1150" dirty="0">
+              <a:rPr lang="en-US" sz="1080" dirty="0">
                 <a:solidFill>
                   <a:srgbClr val="172B3A"/>
                 </a:solidFill>
@@ -27570,9 +27502,9 @@
                 <a:ea typeface="Calibri" pitchFamily="34" charset="-122"/>
                 <a:cs typeface="Calibri" pitchFamily="34" charset="-120"/>
               </a:rPr>
-              <a:t>Tên, ngày, rating… mô tả node/cạnh; ID phân biệt identity.</a:t>
-            </a:r>
-            <a:endParaRPr lang="en-US" sz="1150" dirty="0"/>
+              <a:t>Thuộc tính mô tả thực thể; định danh ổn định cho biết chính xác thực thể nào đang được nói tới.</a:t>
+            </a:r>
+            <a:endParaRPr lang="en-US" sz="1080" dirty="0"/>
           </a:p>
         </p:txBody>
       </p:sp>
@@ -28960,7 +28892,7 @@
                 <a:ea typeface="Calibri" pitchFamily="34" charset="-122"/>
                 <a:cs typeface="Calibri" pitchFamily="34" charset="-120"/>
               </a:rPr>
-              <a:t>Tích hợp đúng</a:t>
+              <a:t>Tích hợp nhất quán</a:t>
             </a:r>
             <a:endParaRPr lang="en-US" sz="2000" dirty="0"/>
           </a:p>
@@ -29001,7 +28933,7 @@
                 <a:ea typeface="Calibri" pitchFamily="34" charset="-122"/>
                 <a:cs typeface="Calibri" pitchFamily="34" charset="-120"/>
               </a:rPr>
-              <a:t>TMDB + IMDb, stable ID, provenance và quy trình tái lập.</a:t>
+              <a:t>TMDB và IMDb được nối bằng ID ổn định, giữ nguồn gốc và có thể tái lập.</a:t>
             </a:r>
             <a:endParaRPr lang="en-US" sz="1350" dirty="0"/>
           </a:p>
@@ -29079,7 +29011,7 @@
                 <a:ea typeface="Calibri" pitchFamily="34" charset="-122"/>
                 <a:cs typeface="Calibri" pitchFamily="34" charset="-120"/>
               </a:rPr>
-              <a:t>Truy vấn được</a:t>
+              <a:t>Khai thác quan hệ</a:t>
             </a:r>
             <a:endParaRPr lang="en-US" sz="2000" dirty="0"/>
           </a:p>
@@ -29120,7 +29052,7 @@
                 <a:ea typeface="Calibri" pitchFamily="34" charset="-122"/>
                 <a:cs typeface="Calibri" pitchFamily="34" charset="-120"/>
               </a:rPr>
-              <a:t>Cypher multi-hop và derived fact có bằng chứng.</a:t>
+              <a:t>Cypher duyệt nhiều bước và tạo sự kiện suy ra kèm căn cứ.</a:t>
             </a:r>
             <a:endParaRPr lang="en-US" sz="1350" dirty="0"/>
           </a:p>
@@ -29198,7 +29130,7 @@
                 <a:ea typeface="Calibri" pitchFamily="34" charset="-122"/>
                 <a:cs typeface="Calibri" pitchFamily="34" charset="-120"/>
               </a:rPr>
-              <a:t>Giải thích được</a:t>
+              <a:t>Kiểm chứng kết quả</a:t>
             </a:r>
             <a:endParaRPr lang="en-US" sz="2000" dirty="0"/>
           </a:p>
@@ -29239,7 +29171,7 @@
                 <a:ea typeface="Calibri" pitchFamily="34" charset="-122"/>
                 <a:cs typeface="Calibri" pitchFamily="34" charset="-120"/>
               </a:rPr>
-              <a:t>QA và gợi ý trả cả thực thể, path và đóng góp điểm.</a:t>
+              <a:t>Hỏi–đáp và gợi ý trả cả thực thể, đường đi và đặc trưng đóng góp.</a:t>
             </a:r>
             <a:endParaRPr lang="en-US" sz="1350" dirty="0"/>
           </a:p>
@@ -30327,7 +30259,7 @@
                 <a:ea typeface="Calibri" pitchFamily="34" charset="-122"/>
                 <a:cs typeface="Calibri" pitchFamily="34" charset="-120"/>
               </a:rPr>
-              <a:t>Graph schema</a:t>
+              <a:t>Schema của đồ thị</a:t>
             </a:r>
             <a:endParaRPr lang="en-US" sz="1600" dirty="0"/>
           </a:p>
@@ -30360,7 +30292,7 @@
               <a:buNone/>
             </a:pPr>
             <a:r>
-              <a:rPr lang="en-US" sz="1150" dirty="0">
+              <a:rPr lang="en-US" sz="950" dirty="0">
                 <a:solidFill>
                   <a:srgbClr val="172B3A"/>
                 </a:solidFill>
@@ -30368,9 +30300,9 @@
                 <a:ea typeface="Calibri" pitchFamily="34" charset="-122"/>
                 <a:cs typeface="Calibri" pitchFamily="34" charset="-120"/>
               </a:rPr>
-              <a:t>Định nghĩa label, thuộc tính, quan hệ, ràng buộc.</a:t>
-            </a:r>
-            <a:endParaRPr lang="en-US" sz="1150" dirty="0"/>
+              <a:t>Quy định dữ liệu được phép có những lớp, quan hệ và ràng buộc nào.</a:t>
+            </a:r>
+            <a:endParaRPr lang="en-US" sz="950" dirty="0"/>
           </a:p>
         </p:txBody>
       </p:sp>
@@ -30500,7 +30432,7 @@
                 <a:ea typeface="Calibri" pitchFamily="34" charset="-122"/>
                 <a:cs typeface="Calibri" pitchFamily="34" charset="-120"/>
               </a:rPr>
-              <a:t>Knowledge base</a:t>
+              <a:t>Cơ sở tri thức</a:t>
             </a:r>
             <a:endParaRPr lang="en-US" sz="1600" dirty="0"/>
           </a:p>
@@ -30533,7 +30465,7 @@
               <a:buNone/>
             </a:pPr>
             <a:r>
-              <a:rPr lang="en-US" sz="1150" dirty="0">
+              <a:rPr lang="en-US" sz="950" dirty="0">
                 <a:solidFill>
                   <a:srgbClr val="172B3A"/>
                 </a:solidFill>
@@ -30541,9 +30473,9 @@
                 <a:ea typeface="Calibri" pitchFamily="34" charset="-122"/>
                 <a:cs typeface="Calibri" pitchFamily="34" charset="-120"/>
               </a:rPr>
-              <a:t>Schema + tập instance/fact đang lưu.</a:t>
-            </a:r>
-            <a:endParaRPr lang="en-US" sz="1150" dirty="0"/>
+              <a:t>Kết hợp schema với tập thực thể và sự kiện đang được lưu.</a:t>
+            </a:r>
+            <a:endParaRPr lang="en-US" sz="950" dirty="0"/>
           </a:p>
         </p:txBody>
       </p:sp>
@@ -30673,7 +30605,7 @@
                 <a:ea typeface="Calibri" pitchFamily="34" charset="-122"/>
                 <a:cs typeface="Calibri" pitchFamily="34" charset="-120"/>
               </a:rPr>
-              <a:t>Knowledge Graph</a:t>
+              <a:t>Đồ thị tri thức</a:t>
             </a:r>
             <a:endParaRPr lang="en-US" sz="1600" dirty="0"/>
           </a:p>
@@ -30706,7 +30638,7 @@
               <a:buNone/>
             </a:pPr>
             <a:r>
-              <a:rPr lang="en-US" sz="1150" dirty="0">
+              <a:rPr lang="en-US" sz="950" dirty="0">
                 <a:solidFill>
                   <a:srgbClr val="172B3A"/>
                 </a:solidFill>
@@ -30714,9 +30646,9 @@
                 <a:ea typeface="Calibri" pitchFamily="34" charset="-122"/>
                 <a:cs typeface="Calibri" pitchFamily="34" charset="-120"/>
               </a:rPr>
-              <a:t>Knowledge base được tổ chức và truy vấn như đồ thị.</a:t>
-            </a:r>
-            <a:endParaRPr lang="en-US" sz="1150" dirty="0"/>
+              <a:t>Tổ chức cơ sở tri thức thành các đường liên kết có thể truy vấn và kiểm chứng.</a:t>
+            </a:r>
+            <a:endParaRPr lang="en-US" sz="950" dirty="0"/>
           </a:p>
         </p:txBody>
       </p:sp>
@@ -30908,7 +30840,7 @@
                 <a:ea typeface="Calibri" pitchFamily="34" charset="-122"/>
                 <a:cs typeface="Calibri" pitchFamily="34" charset="-120"/>
               </a:rPr>
-              <a:t>Đây là mô hình graph duy nhất được triển khai trong project.</a:t>
+              <a:t>Đây là mô hình đồ thị duy nhất được triển khai trong dự án.</a:t>
             </a:r>
             <a:endParaRPr lang="en-US" sz="1250" dirty="0"/>
           </a:p>
@@ -31246,7 +31178,7 @@
               <a:buNone/>
             </a:pPr>
             <a:r>
-              <a:rPr lang="en-US" sz="1300" b="1" dirty="0">
+              <a:rPr lang="en-US" sz="1250" b="1" dirty="0">
                 <a:solidFill>
                   <a:srgbClr val="112B46"/>
                 </a:solidFill>
@@ -31254,9 +31186,9 @@
                 <a:ea typeface="Calibri" pitchFamily="34" charset="-122"/>
                 <a:cs typeface="Calibri" pitchFamily="34" charset="-120"/>
               </a:rPr>
-              <a:t>Node properties</a:t>
-            </a:r>
-            <a:endParaRPr lang="en-US" sz="1300" dirty="0"/>
+              <a:t>Thuộc tính Person</a:t>
+            </a:r>
+            <a:endParaRPr lang="en-US" sz="1250" dirty="0"/>
           </a:p>
         </p:txBody>
       </p:sp>
@@ -31287,7 +31219,7 @@
               <a:buNone/>
             </a:pPr>
             <a:r>
-              <a:rPr lang="en-US" sz="1000" dirty="0">
+              <a:rPr lang="en-US" sz="920" dirty="0">
                 <a:solidFill>
                   <a:srgbClr val="172B3A"/>
                 </a:solidFill>
@@ -31295,9 +31227,9 @@
                 <a:ea typeface="Calibri" pitchFamily="34" charset="-122"/>
                 <a:cs typeface="Calibri" pitchFamily="34" charset="-120"/>
               </a:rPr>
-              <a:t>name · birthday</a:t>
-            </a:r>
-            <a:endParaRPr lang="en-US" sz="1000" dirty="0"/>
+              <a:t>`name`, `birthday` mô tả người.</a:t>
+            </a:r>
+            <a:endParaRPr lang="en-US" sz="920" dirty="0"/>
           </a:p>
         </p:txBody>
       </p:sp>
@@ -31355,7 +31287,7 @@
               <a:buNone/>
             </a:pPr>
             <a:r>
-              <a:rPr lang="en-US" sz="1300" b="1" dirty="0">
+              <a:rPr lang="en-US" sz="1250" b="1" dirty="0">
                 <a:solidFill>
                   <a:srgbClr val="112B46"/>
                 </a:solidFill>
@@ -31363,9 +31295,9 @@
                 <a:ea typeface="Calibri" pitchFamily="34" charset="-122"/>
                 <a:cs typeface="Calibri" pitchFamily="34" charset="-120"/>
               </a:rPr>
-              <a:t>Edge properties</a:t>
-            </a:r>
-            <a:endParaRPr lang="en-US" sz="1300" dirty="0"/>
+              <a:t>Thuộc tính ACTED_IN</a:t>
+            </a:r>
+            <a:endParaRPr lang="en-US" sz="1250" dirty="0"/>
           </a:p>
         </p:txBody>
       </p:sp>
@@ -31396,7 +31328,7 @@
               <a:buNone/>
             </a:pPr>
             <a:r>
-              <a:rPr lang="en-US" sz="1000" dirty="0">
+              <a:rPr lang="en-US" sz="920" dirty="0">
                 <a:solidFill>
                   <a:srgbClr val="172B3A"/>
                 </a:solidFill>
@@ -31404,9 +31336,9 @@
                 <a:ea typeface="Calibri" pitchFamily="34" charset="-122"/>
                 <a:cs typeface="Calibri" pitchFamily="34" charset="-120"/>
               </a:rPr>
-              <a:t>character · cast_order</a:t>
-            </a:r>
-            <a:endParaRPr lang="en-US" sz="1000" dirty="0"/>
+              <a:t>`character`, `cast_order` mô tả lần tham gia.</a:t>
+            </a:r>
+            <a:endParaRPr lang="en-US" sz="920" dirty="0"/>
           </a:p>
         </p:txBody>
       </p:sp>
@@ -31464,7 +31396,7 @@
               <a:buNone/>
             </a:pPr>
             <a:r>
-              <a:rPr lang="en-US" sz="1300" b="1" dirty="0">
+              <a:rPr lang="en-US" sz="1250" b="1" dirty="0">
                 <a:solidFill>
                   <a:srgbClr val="112B46"/>
                 </a:solidFill>
@@ -31472,9 +31404,9 @@
                 <a:ea typeface="Calibri" pitchFamily="34" charset="-122"/>
                 <a:cs typeface="Calibri" pitchFamily="34" charset="-120"/>
               </a:rPr>
-              <a:t>Node properties</a:t>
-            </a:r>
-            <a:endParaRPr lang="en-US" sz="1300" dirty="0"/>
+              <a:t>Thuộc tính Movie</a:t>
+            </a:r>
+            <a:endParaRPr lang="en-US" sz="1250" dirty="0"/>
           </a:p>
         </p:txBody>
       </p:sp>
@@ -31505,7 +31437,7 @@
               <a:buNone/>
             </a:pPr>
             <a:r>
-              <a:rPr lang="en-US" sz="1000" dirty="0">
+              <a:rPr lang="en-US" sz="920" dirty="0">
                 <a:solidFill>
                   <a:srgbClr val="172B3A"/>
                 </a:solidFill>
@@ -31513,9 +31445,9 @@
                 <a:ea typeface="Calibri" pitchFamily="34" charset="-122"/>
                 <a:cs typeface="Calibri" pitchFamily="34" charset="-120"/>
               </a:rPr>
-              <a:t>title · release_date</a:t>
-            </a:r>
-            <a:endParaRPr lang="en-US" sz="1000" dirty="0"/>
+              <a:t>`title`, `release_date` mô tả phim.</a:t>
+            </a:r>
+            <a:endParaRPr lang="en-US" sz="920" dirty="0"/>
           </a:p>
         </p:txBody>
       </p:sp>
@@ -31652,7 +31584,7 @@
                 <a:ea typeface="Calibri" pitchFamily="34" charset="-122"/>
                 <a:cs typeface="Calibri" pitchFamily="34" charset="-120"/>
               </a:rPr>
-              <a:t>Node</a:t>
+              <a:t>Node biểu diễn thực thể</a:t>
             </a:r>
             <a:endParaRPr lang="en-US" sz="1600" dirty="0"/>
           </a:p>
@@ -31685,7 +31617,7 @@
               <a:buNone/>
             </a:pPr>
             <a:r>
-              <a:rPr lang="en-US" sz="1150" dirty="0">
+              <a:rPr lang="en-US" sz="1050" dirty="0">
                 <a:solidFill>
                   <a:srgbClr val="172B3A"/>
                 </a:solidFill>
@@ -31693,9 +31625,9 @@
                 <a:ea typeface="Calibri" pitchFamily="34" charset="-122"/>
                 <a:cs typeface="Calibri" pitchFamily="34" charset="-120"/>
               </a:rPr>
-              <a:t>Thực thể có label, định danh và thuộc tính.</a:t>
-            </a:r>
-            <a:endParaRPr lang="en-US" sz="1150" dirty="0"/>
+              <a:t>Mỗi node có nhãn lớp, định danh ổn định và các thuộc tính mô tả.</a:t>
+            </a:r>
+            <a:endParaRPr lang="en-US" sz="1050" dirty="0"/>
           </a:p>
         </p:txBody>
       </p:sp>
@@ -31832,7 +31764,7 @@
                 <a:ea typeface="Calibri" pitchFamily="34" charset="-122"/>
                 <a:cs typeface="Calibri" pitchFamily="34" charset="-120"/>
               </a:rPr>
-              <a:t>Relationship</a:t>
+              <a:t>Cạnh biểu diễn quan hệ</a:t>
             </a:r>
             <a:endParaRPr lang="en-US" sz="1600" dirty="0"/>
           </a:p>
@@ -31865,7 +31797,7 @@
               <a:buNone/>
             </a:pPr>
             <a:r>
-              <a:rPr lang="en-US" sz="1150" dirty="0">
+              <a:rPr lang="en-US" sz="1050" dirty="0">
                 <a:solidFill>
                   <a:srgbClr val="172B3A"/>
                 </a:solidFill>
@@ -31873,9 +31805,9 @@
                 <a:ea typeface="Calibri" pitchFamily="34" charset="-122"/>
                 <a:cs typeface="Calibri" pitchFamily="34" charset="-120"/>
               </a:rPr>
-              <a:t>Cạnh có loại, hướng và nối hai node.</a:t>
-            </a:r>
-            <a:endParaRPr lang="en-US" sz="1150" dirty="0"/>
+              <a:t>Mỗi cạnh có loại và hướng, nhờ đó liên kết mang ý nghĩa thay vì chỉ nối hai điểm.</a:t>
+            </a:r>
+            <a:endParaRPr lang="en-US" sz="1050" dirty="0"/>
           </a:p>
         </p:txBody>
       </p:sp>
@@ -32012,7 +31944,7 @@
                 <a:ea typeface="Calibri" pitchFamily="34" charset="-122"/>
                 <a:cs typeface="Calibri" pitchFamily="34" charset="-120"/>
               </a:rPr>
-              <a:t>Property</a:t>
+              <a:t>Thuộc tính giữ ngữ cảnh</a:t>
             </a:r>
             <a:endParaRPr lang="en-US" sz="1600" dirty="0"/>
           </a:p>
@@ -32053,7 +31985,7 @@
                 <a:ea typeface="Calibri" pitchFamily="34" charset="-122"/>
                 <a:cs typeface="Calibri" pitchFamily="34" charset="-120"/>
               </a:rPr>
-              <a:t>Dữ liệu mô tả có thể nằm trên cả node và cạnh.</a:t>
+              <a:t>Thuộc tính có thể nằm trên node hoặc cạnh, tùy đối tượng mà nó thực sự mô tả.</a:t>
             </a:r>
             <a:endParaRPr lang="en-US" sz="1050" dirty="0"/>
           </a:p>
@@ -32378,7 +32310,7 @@
               <a:buNone/>
             </a:pPr>
             <a:r>
-              <a:rPr lang="en-US" sz="2100" b="1" dirty="0">
+              <a:rPr lang="en-US" sz="1900" b="1" dirty="0">
                 <a:solidFill>
                   <a:srgbClr val="337B80"/>
                 </a:solidFill>
@@ -32386,9 +32318,9 @@
                 <a:ea typeface="Calibri" pitchFamily="34" charset="-122"/>
                 <a:cs typeface="Calibri" pitchFamily="34" charset="-120"/>
               </a:rPr>
-              <a:t>Neighborhood</a:t>
-            </a:r>
-            <a:endParaRPr lang="en-US" sz="2100" dirty="0"/>
+              <a:t>Lân cận (neighborhood)</a:t>
+            </a:r>
+            <a:endParaRPr lang="en-US" sz="1900" dirty="0"/>
           </a:p>
         </p:txBody>
       </p:sp>
@@ -32419,7 +32351,7 @@
               <a:buNone/>
             </a:pPr>
             <a:r>
-              <a:rPr lang="en-US" sz="1400" dirty="0">
+              <a:rPr lang="en-US" sz="1300" dirty="0">
                 <a:solidFill>
                   <a:srgbClr val="172B3A"/>
                 </a:solidFill>
@@ -32427,22 +32359,22 @@
                 <a:ea typeface="Calibri" pitchFamily="34" charset="-122"/>
                 <a:cs typeface="Calibri" pitchFamily="34" charset="-120"/>
               </a:rPr>
-              <a:t>Tập node kề một node qua một hoặc nhiều loại quan hệ.</a:t>
-            </a:r>
-            <a:endParaRPr lang="en-US" sz="1400" dirty="0"/>
-          </a:p>
-          <a:p>
-            <a:pPr indent="0" marL="0">
-              <a:buNone/>
-            </a:pPr>
-            <a:endParaRPr lang="en-US" sz="1400" dirty="0"/>
-          </a:p>
-          <a:p>
-            <a:pPr indent="0" marL="0">
-              <a:buNone/>
-            </a:pPr>
-            <a:r>
-              <a:rPr lang="en-US" sz="1400" dirty="0">
+              <a:t>Là tập thực thể nối trực tiếp hoặc trong một số bước nhất định quanh một thực thể trung tâm.</a:t>
+            </a:r>
+            <a:endParaRPr lang="en-US" sz="1300" dirty="0"/>
+          </a:p>
+          <a:p>
+            <a:pPr indent="0" marL="0">
+              <a:buNone/>
+            </a:pPr>
+            <a:endParaRPr lang="en-US" sz="1300" dirty="0"/>
+          </a:p>
+          <a:p>
+            <a:pPr indent="0" marL="0">
+              <a:buNone/>
+            </a:pPr>
+            <a:r>
+              <a:rPr lang="en-US" sz="1300" dirty="0">
                 <a:solidFill>
                   <a:srgbClr val="172B3A"/>
                 </a:solidFill>
@@ -32450,26 +32382,9 @@
                 <a:ea typeface="Calibri" pitchFamily="34" charset="-122"/>
                 <a:cs typeface="Calibri" pitchFamily="34" charset="-120"/>
               </a:rPr>
-              <a:t>Ví dụ:</a:t>
-            </a:r>
-            <a:endParaRPr lang="en-US" sz="1400" dirty="0"/>
-          </a:p>
-          <a:p>
-            <a:pPr indent="0" marL="0">
-              <a:buNone/>
-            </a:pPr>
-            <a:r>
-              <a:rPr lang="en-US" sz="1400" dirty="0">
-                <a:solidFill>
-                  <a:srgbClr val="172B3A"/>
-                </a:solidFill>
-                <a:latin typeface="Calibri" pitchFamily="34" charset="0"/>
-                <a:ea typeface="Calibri" pitchFamily="34" charset="-122"/>
-                <a:cs typeface="Calibri" pitchFamily="34" charset="-120"/>
-              </a:rPr>
-              <a:t>các diễn viên, đạo diễn, thể loại và keyword lân cận một Movie.</a:t>
-            </a:r>
-            <a:endParaRPr lang="en-US" sz="1400" dirty="0"/>
+              <a:t>Trong dự án, lân cận của một Movie gồm diễn viên, đạo diễn, thể loại, từ khóa và hãng phim; đây là dữ liệu đầu vào của phép gợi ý tương tự.</a:t>
+            </a:r>
+            <a:endParaRPr lang="en-US" sz="1300" dirty="0"/>
           </a:p>
         </p:txBody>
       </p:sp>
@@ -32598,7 +32513,7 @@
               <a:buNone/>
             </a:pPr>
             <a:r>
-              <a:rPr lang="en-US" sz="2100" b="1" dirty="0">
+              <a:rPr lang="en-US" sz="1900" b="1" dirty="0">
                 <a:solidFill>
                   <a:srgbClr val="725B9B"/>
                 </a:solidFill>
@@ -32606,9 +32521,9 @@
                 <a:ea typeface="Calibri" pitchFamily="34" charset="-122"/>
                 <a:cs typeface="Calibri" pitchFamily="34" charset="-120"/>
               </a:rPr>
-              <a:t>Path</a:t>
-            </a:r>
-            <a:endParaRPr lang="en-US" sz="2100" dirty="0"/>
+              <a:t>Đường đi (path)</a:t>
+            </a:r>
+            <a:endParaRPr lang="en-US" sz="1900" dirty="0"/>
           </a:p>
         </p:txBody>
       </p:sp>
@@ -32639,7 +32554,7 @@
               <a:buNone/>
             </a:pPr>
             <a:r>
-              <a:rPr lang="en-US" sz="1400" dirty="0">
+              <a:rPr lang="en-US" sz="1300" dirty="0">
                 <a:solidFill>
                   <a:srgbClr val="172B3A"/>
                 </a:solidFill>
@@ -32647,22 +32562,22 @@
                 <a:ea typeface="Calibri" pitchFamily="34" charset="-122"/>
                 <a:cs typeface="Calibri" pitchFamily="34" charset="-120"/>
               </a:rPr>
-              <a:t>Dãy node và relationship nối hai thực thể.</a:t>
-            </a:r>
-            <a:endParaRPr lang="en-US" sz="1400" dirty="0"/>
-          </a:p>
-          <a:p>
-            <a:pPr indent="0" marL="0">
-              <a:buNone/>
-            </a:pPr>
-            <a:endParaRPr lang="en-US" sz="1400" dirty="0"/>
-          </a:p>
-          <a:p>
-            <a:pPr indent="0" marL="0">
-              <a:buNone/>
-            </a:pPr>
-            <a:r>
-              <a:rPr lang="en-US" sz="1400" dirty="0">
+              <a:t>Là một dãy node và cạnh liên tiếp nối hai thực thể. Độ dài đường đi được tính bằng số cạnh.</a:t>
+            </a:r>
+            <a:endParaRPr lang="en-US" sz="1300" dirty="0"/>
+          </a:p>
+          <a:p>
+            <a:pPr indent="0" marL="0">
+              <a:buNone/>
+            </a:pPr>
+            <a:endParaRPr lang="en-US" sz="1300" dirty="0"/>
+          </a:p>
+          <a:p>
+            <a:pPr indent="0" marL="0">
+              <a:buNone/>
+            </a:pPr>
+            <a:r>
+              <a:rPr lang="en-US" sz="1300" dirty="0">
                 <a:solidFill>
                   <a:srgbClr val="172B3A"/>
                 </a:solidFill>
@@ -32670,9 +32585,9 @@
                 <a:ea typeface="Calibri" pitchFamily="34" charset="-122"/>
                 <a:cs typeface="Calibri" pitchFamily="34" charset="-120"/>
               </a:rPr>
-              <a:t>Độ dài path là số cạnh; shortest path tối thiểu hóa số bước trong phạm vi đã định.</a:t>
-            </a:r>
-            <a:endParaRPr lang="en-US" sz="1400" dirty="0"/>
+              <a:t>Truy vấn nhiều bước và shortest path không chỉ trả kết quả, mà còn cho biết kết quả được nối qua những quan hệ nào.</a:t>
+            </a:r>
+            <a:endParaRPr lang="en-US" sz="1300" dirty="0"/>
           </a:p>
         </p:txBody>
       </p:sp>
@@ -32801,7 +32716,7 @@
               <a:buNone/>
             </a:pPr>
             <a:r>
-              <a:rPr lang="en-US" sz="2100" b="1" dirty="0">
+              <a:rPr lang="en-US" sz="1900" b="1" dirty="0">
                 <a:solidFill>
                   <a:srgbClr val="3D8B66"/>
                 </a:solidFill>
@@ -32809,9 +32724,9 @@
                 <a:ea typeface="Calibri" pitchFamily="34" charset="-122"/>
                 <a:cs typeface="Calibri" pitchFamily="34" charset="-120"/>
               </a:rPr>
-              <a:t>Subgraph</a:t>
-            </a:r>
-            <a:endParaRPr lang="en-US" sz="2100" dirty="0"/>
+              <a:t>Đồ thị con (subgraph)</a:t>
+            </a:r>
+            <a:endParaRPr lang="en-US" sz="1900" dirty="0"/>
           </a:p>
         </p:txBody>
       </p:sp>
@@ -32842,7 +32757,7 @@
               <a:buNone/>
             </a:pPr>
             <a:r>
-              <a:rPr lang="en-US" sz="1400" dirty="0">
+              <a:rPr lang="en-US" sz="1300" dirty="0">
                 <a:solidFill>
                   <a:srgbClr val="172B3A"/>
                 </a:solidFill>
@@ -32850,22 +32765,22 @@
                 <a:ea typeface="Calibri" pitchFamily="34" charset="-122"/>
                 <a:cs typeface="Calibri" pitchFamily="34" charset="-120"/>
               </a:rPr>
-              <a:t>Một phần của graph được cảm sinh bởi tập node/edge liên quan.</a:t>
-            </a:r>
-            <a:endParaRPr lang="en-US" sz="1400" dirty="0"/>
-          </a:p>
-          <a:p>
-            <a:pPr indent="0" marL="0">
-              <a:buNone/>
-            </a:pPr>
-            <a:endParaRPr lang="en-US" sz="1400" dirty="0"/>
-          </a:p>
-          <a:p>
-            <a:pPr indent="0" marL="0">
-              <a:buNone/>
-            </a:pPr>
-            <a:r>
-              <a:rPr lang="en-US" sz="1400" dirty="0">
+              <a:t>Là phần graph chỉ gồm các node và cạnh liên quan đến một mục tiêu cụ thể.</a:t>
+            </a:r>
+            <a:endParaRPr lang="en-US" sz="1300" dirty="0"/>
+          </a:p>
+          <a:p>
+            <a:pPr indent="0" marL="0">
+              <a:buNone/>
+            </a:pPr>
+            <a:endParaRPr lang="en-US" sz="1300" dirty="0"/>
+          </a:p>
+          <a:p>
+            <a:pPr indent="0" marL="0">
+              <a:buNone/>
+            </a:pPr>
+            <a:r>
+              <a:rPr lang="en-US" sz="1300" dirty="0">
                 <a:solidFill>
                   <a:srgbClr val="172B3A"/>
                 </a:solidFill>
@@ -32873,9 +32788,9 @@
                 <a:ea typeface="Calibri" pitchFamily="34" charset="-122"/>
                 <a:cs typeface="Calibri" pitchFamily="34" charset="-120"/>
               </a:rPr>
-              <a:t>Subgraph giúp giới hạn ngữ cảnh, trình bày evidence và tạo snapshot đánh giá.</a:t>
-            </a:r>
-            <a:endParaRPr lang="en-US" sz="1400" dirty="0"/>
+              <a:t>Dự án dùng đồ thị con để giới hạn ngữ cảnh giải thích và tạo các snapshot có cùng phạm vi khi đánh giá.</a:t>
+            </a:r>
+            <a:endParaRPr lang="en-US" sz="1300" dirty="0"/>
           </a:p>
         </p:txBody>
       </p:sp>
@@ -33193,7 +33108,7 @@
                 <a:ea typeface="Calibri" pitchFamily="34" charset="-122"/>
                 <a:cs typeface="Calibri" pitchFamily="34" charset="-120"/>
               </a:rPr>
-              <a:t>Node và edge mới chỉ là cấu trúc; identity, schema, provenance và competency questions tạo nên lớp tri thức.</a:t>
+              <a:t>Node và cạnh chỉ tạo ra cấu trúc; bốn nguyên tắc dưới đây mới làm cấu trúc đó có nghĩa và có mục đích.</a:t>
             </a:r>
             <a:endParaRPr lang="en-US" sz="1250" dirty="0"/>
           </a:p>
@@ -33268,7 +33183,7 @@
                 <a:ea typeface="Calibri" pitchFamily="34" charset="-122"/>
                 <a:cs typeface="Calibri" pitchFamily="34" charset="-120"/>
               </a:rPr>
-              <a:t>1 · Identity — biết đang nói về ai/cái gì</a:t>
+              <a:t>1 · Định danh — biết đang nói về thực thể nào</a:t>
             </a:r>
             <a:endParaRPr lang="en-US" sz="1800" dirty="0"/>
           </a:p>
@@ -33301,7 +33216,7 @@
               <a:buNone/>
             </a:pPr>
             <a:r>
-              <a:rPr lang="en-US" sz="1250" dirty="0">
+              <a:rPr lang="en-US" sz="1220" dirty="0">
                 <a:solidFill>
                   <a:srgbClr val="172B3A"/>
                 </a:solidFill>
@@ -33309,9 +33224,9 @@
                 <a:ea typeface="Calibri" pitchFamily="34" charset="-122"/>
                 <a:cs typeface="Calibri" pitchFamily="34" charset="-120"/>
               </a:rPr>
-              <a:t>Mỗi thực thể cần một định danh ổn định, độc lập với cách viết tên. Trong project, source ID của TMDB/IMDb được ưu tiên; tên chỉ phục vụ hiển thị và tìm kiếm. Điều này ngăn hai người trùng tên bị gộp và một phim có nhiều cách viết bị tách sai.</a:t>
-            </a:r>
-            <a:endParaRPr lang="en-US" sz="1250" dirty="0"/>
+              <a:t>Mỗi thực thể cần một ID ổn định, độc lập với cách viết tên. Dự án ưu tiên ID nguồn của TMDB/IMDb; tên chỉ phục vụ hiển thị và tìm kiếm. Nhờ vậy, hai người trùng tên không bị gộp và một phim có nhiều cách viết không bị tách sai.</a:t>
+            </a:r>
+            <a:endParaRPr lang="en-US" sz="1220" dirty="0"/>
           </a:p>
         </p:txBody>
       </p:sp>
@@ -33384,7 +33299,7 @@
                 <a:ea typeface="Calibri" pitchFamily="34" charset="-122"/>
                 <a:cs typeface="Calibri" pitchFamily="34" charset="-120"/>
               </a:rPr>
-              <a:t>2 · Schema — biết fact có hình dạng nào</a:t>
+              <a:t>2 · Schema — biết sự kiện có hình dạng nào</a:t>
             </a:r>
             <a:endParaRPr lang="en-US" sz="1800" dirty="0"/>
           </a:p>
@@ -33417,7 +33332,7 @@
               <a:buNone/>
             </a:pPr>
             <a:r>
-              <a:rPr lang="en-US" sz="1250" dirty="0">
+              <a:rPr lang="en-US" sz="1220" dirty="0">
                 <a:solidFill>
                   <a:srgbClr val="172B3A"/>
                 </a:solidFill>
@@ -33425,9 +33340,9 @@
                 <a:ea typeface="Calibri" pitchFamily="34" charset="-122"/>
                 <a:cs typeface="Calibri" pitchFamily="34" charset="-120"/>
               </a:rPr>
-              <a:t>Schema quy định label, loại relationship, thuộc tính bắt buộc và miền giá trị. Nó tạo một ngôn ngữ chung để dữ liệu từ nhiều nguồn có thể nhập vào cùng mô hình và để query không phụ thuộc cấu trúc tùy ý.</a:t>
-            </a:r>
-            <a:endParaRPr lang="en-US" sz="1250" dirty="0"/>
+              <a:t>Schema quy định lớp thực thể, loại quan hệ, thuộc tính bắt buộc và miền giá trị. Nó tạo ngôn ngữ chung để dữ liệu từ nhiều nguồn đi vào cùng một mô hình và để truy vấn dựa trên cấu trúc nhất quán.</a:t>
+            </a:r>
+            <a:endParaRPr lang="en-US" sz="1220" dirty="0"/>
           </a:p>
         </p:txBody>
       </p:sp>
@@ -33500,7 +33415,7 @@
                 <a:ea typeface="Calibri" pitchFamily="34" charset="-122"/>
                 <a:cs typeface="Calibri" pitchFamily="34" charset="-120"/>
               </a:rPr>
-              <a:t>3 · Provenance — biết fact đến từ đâu</a:t>
+              <a:t>3 · Nguồn gốc — biết sự kiện đến từ đâu</a:t>
             </a:r>
             <a:endParaRPr lang="en-US" sz="1800" dirty="0"/>
           </a:p>
@@ -33533,7 +33448,7 @@
               <a:buNone/>
             </a:pPr>
             <a:r>
-              <a:rPr lang="en-US" sz="1250" dirty="0">
+              <a:rPr lang="en-US" sz="1220" dirty="0">
                 <a:solidFill>
                   <a:srgbClr val="172B3A"/>
                 </a:solidFill>
@@ -33541,9 +33456,9 @@
                 <a:ea typeface="Calibri" pitchFamily="34" charset="-122"/>
                 <a:cs typeface="Calibri" pitchFamily="34" charset="-120"/>
               </a:rPr>
-              <a:t>Fact được khẳng định cần gắn với nguồn; fact suy ra cần giữ luật và supporting facts. Provenance giúp kiểm tra, tái tạo và giải thích kết quả thay vì coi graph như một hộp đen.</a:t>
-            </a:r>
-            <a:endParaRPr lang="en-US" sz="1250" dirty="0"/>
+              <a:t>Sự kiện nhập trực tiếp phải chỉ ra nguồn; sự kiện suy ra phải giữ luật và các sự kiện hỗ trợ. Nhờ đó, người dùng có thể kiểm tra và tái tạo kết quả thay vì phải tin vào một hộp đen.</a:t>
+            </a:r>
+            <a:endParaRPr lang="en-US" sz="1220" dirty="0"/>
           </a:p>
         </p:txBody>
       </p:sp>
@@ -33616,7 +33531,7 @@
                 <a:ea typeface="Calibri" pitchFamily="34" charset="-122"/>
                 <a:cs typeface="Calibri" pitchFamily="34" charset="-120"/>
               </a:rPr>
-              <a:t>4 · Competency questions — biết graph dùng để làm gì</a:t>
+              <a:t>4 · Câu hỏi năng lực — biết graph được xây để làm gì</a:t>
             </a:r>
             <a:endParaRPr lang="en-US" sz="1800" dirty="0"/>
           </a:p>
@@ -33649,7 +33564,7 @@
               <a:buNone/>
             </a:pPr>
             <a:r>
-              <a:rPr lang="en-US" sz="1250" dirty="0">
+              <a:rPr lang="en-US" sz="1220" dirty="0">
                 <a:solidFill>
                   <a:srgbClr val="172B3A"/>
                 </a:solidFill>
@@ -33657,9 +33572,9 @@
                 <a:ea typeface="Calibri" pitchFamily="34" charset="-122"/>
                 <a:cs typeface="Calibri" pitchFamily="34" charset="-120"/>
               </a:rPr>
-              <a:t>Câu hỏi năng lực xác định phạm vi tri thức cần biểu diễn. Nếu schema không trả lời được các câu hỏi đã công bố, việc có nhiều node/edge không tạo ra giá trị nghiệp vụ.</a:t>
-            </a:r>
-            <a:endParaRPr lang="en-US" sz="1250" dirty="0"/>
+              <a:t>Câu hỏi năng lực xác định tri thức tối thiểu cần biểu diễn. Nếu schema không trả lời được các câu hỏi đã công bố, việc có nhiều node và cạnh vẫn chưa tạo ra giá trị cho bài toán.</a:t>
+            </a:r>
+            <a:endParaRPr lang="en-US" sz="1220" dirty="0"/>
           </a:p>
         </p:txBody>
       </p:sp>
@@ -33810,7 +33725,7 @@
                 <a:ea typeface="Calibri" pitchFamily="34" charset="-122"/>
                 <a:cs typeface="Calibri" pitchFamily="34" charset="-120"/>
               </a:rPr>
-              <a:t>Constraint và index biến schema logic thành bảo đảm vận hành</a:t>
+              <a:t>Constraint bảo vệ tính đúng đắn; index phục vụ tốc độ tra cứu</a:t>
             </a:r>
             <a:endParaRPr lang="en-US" sz="2600" dirty="0"/>
           </a:p>
@@ -33851,7 +33766,7 @@
                 <a:ea typeface="Calibri" pitchFamily="34" charset="-122"/>
                 <a:cs typeface="Calibri" pitchFamily="34" charset="-120"/>
               </a:rPr>
-              <a:t>Neo4j không tự hiểu mọi quy tắc miền; một phần tính đúng đắn phải được khai báo và kiểm tra rõ ràng.</a:t>
+              <a:t>Hai cơ chế thường được tạo cùng lúc nhưng giải quyết hai vấn đề khác nhau và không thể thay thế cho nhau.</a:t>
             </a:r>
             <a:endParaRPr lang="en-US" sz="1250" dirty="0"/>
           </a:p>
@@ -33990,7 +33905,7 @@
                 <a:ea typeface="Calibri" pitchFamily="34" charset="-122"/>
                 <a:cs typeface="Calibri" pitchFamily="34" charset="-120"/>
               </a:rPr>
-              <a:t>Uniqueness constraint</a:t>
+              <a:t>Ràng buộc duy nhất</a:t>
             </a:r>
             <a:endParaRPr lang="en-US" sz="1900" dirty="0"/>
           </a:p>
@@ -34023,7 +33938,7 @@
               <a:buNone/>
             </a:pPr>
             <a:r>
-              <a:rPr lang="en-US" sz="1300" dirty="0">
+              <a:rPr lang="en-US" sz="1250" dirty="0">
                 <a:solidFill>
                   <a:srgbClr val="172B3A"/>
                 </a:solidFill>
@@ -34031,22 +33946,22 @@
                 <a:ea typeface="Calibri" pitchFamily="34" charset="-122"/>
                 <a:cs typeface="Calibri" pitchFamily="34" charset="-120"/>
               </a:rPr>
-              <a:t>Bảo đảm khóa ổn định không xuất hiện hai lần trong cùng label.</a:t>
-            </a:r>
-            <a:endParaRPr lang="en-US" sz="1300" dirty="0"/>
-          </a:p>
-          <a:p>
-            <a:pPr indent="0" marL="0">
-              <a:buNone/>
-            </a:pPr>
-            <a:endParaRPr lang="en-US" sz="1300" dirty="0"/>
-          </a:p>
-          <a:p>
-            <a:pPr indent="0" marL="0">
-              <a:buNone/>
-            </a:pPr>
-            <a:r>
-              <a:rPr lang="en-US" sz="1300" dirty="0">
+              <a:t>Bảo đảm một khóa ổn định không xuất hiện hai lần trong cùng một nhãn.</a:t>
+            </a:r>
+            <a:endParaRPr lang="en-US" sz="1250" dirty="0"/>
+          </a:p>
+          <a:p>
+            <a:pPr indent="0" marL="0">
+              <a:buNone/>
+            </a:pPr>
+            <a:endParaRPr lang="en-US" sz="1250" dirty="0"/>
+          </a:p>
+          <a:p>
+            <a:pPr indent="0" marL="0">
+              <a:buNone/>
+            </a:pPr>
+            <a:r>
+              <a:rPr lang="en-US" sz="1250" dirty="0">
                 <a:solidFill>
                   <a:srgbClr val="172B3A"/>
                 </a:solidFill>
@@ -34056,14 +33971,14 @@
               </a:rPr>
               <a:t>Ví dụ:</a:t>
             </a:r>
-            <a:endParaRPr lang="en-US" sz="1300" dirty="0"/>
-          </a:p>
-          <a:p>
-            <a:pPr indent="0" marL="0">
-              <a:buNone/>
-            </a:pPr>
-            <a:r>
-              <a:rPr lang="en-US" sz="1300" dirty="0">
+            <a:endParaRPr lang="en-US" sz="1250" dirty="0"/>
+          </a:p>
+          <a:p>
+            <a:pPr indent="0" marL="0">
+              <a:buNone/>
+            </a:pPr>
+            <a:r>
+              <a:rPr lang="en-US" sz="1250" dirty="0">
                 <a:solidFill>
                   <a:srgbClr val="172B3A"/>
                 </a:solidFill>
@@ -34073,14 +33988,14 @@
               </a:rPr>
               <a:t>Movie.tmdb_id</a:t>
             </a:r>
-            <a:endParaRPr lang="en-US" sz="1300" dirty="0"/>
-          </a:p>
-          <a:p>
-            <a:pPr indent="0" marL="0">
-              <a:buNone/>
-            </a:pPr>
-            <a:r>
-              <a:rPr lang="en-US" sz="1300" dirty="0">
+            <a:endParaRPr lang="en-US" sz="1250" dirty="0"/>
+          </a:p>
+          <a:p>
+            <a:pPr indent="0" marL="0">
+              <a:buNone/>
+            </a:pPr>
+            <a:r>
+              <a:rPr lang="en-US" sz="1250" dirty="0">
                 <a:solidFill>
                   <a:srgbClr val="172B3A"/>
                 </a:solidFill>
@@ -34090,14 +34005,14 @@
               </a:rPr>
               <a:t>Person.person_id</a:t>
             </a:r>
-            <a:endParaRPr lang="en-US" sz="1300" dirty="0"/>
-          </a:p>
-          <a:p>
-            <a:pPr indent="0" marL="0">
-              <a:buNone/>
-            </a:pPr>
-            <a:r>
-              <a:rPr lang="en-US" sz="1300" dirty="0">
+            <a:endParaRPr lang="en-US" sz="1250" dirty="0"/>
+          </a:p>
+          <a:p>
+            <a:pPr indent="0" marL="0">
+              <a:buNone/>
+            </a:pPr>
+            <a:r>
+              <a:rPr lang="en-US" sz="1250" dirty="0">
                 <a:solidFill>
                   <a:srgbClr val="172B3A"/>
                 </a:solidFill>
@@ -34107,20 +34022,20 @@
               </a:rPr>
               <a:t>Genre.genre_id</a:t>
             </a:r>
-            <a:endParaRPr lang="en-US" sz="1300" dirty="0"/>
-          </a:p>
-          <a:p>
-            <a:pPr indent="0" marL="0">
-              <a:buNone/>
-            </a:pPr>
-            <a:endParaRPr lang="en-US" sz="1300" dirty="0"/>
-          </a:p>
-          <a:p>
-            <a:pPr indent="0" marL="0">
-              <a:buNone/>
-            </a:pPr>
-            <a:r>
-              <a:rPr lang="en-US" sz="1300" dirty="0">
+            <a:endParaRPr lang="en-US" sz="1250" dirty="0"/>
+          </a:p>
+          <a:p>
+            <a:pPr indent="0" marL="0">
+              <a:buNone/>
+            </a:pPr>
+            <a:endParaRPr lang="en-US" sz="1250" dirty="0"/>
+          </a:p>
+          <a:p>
+            <a:pPr indent="0" marL="0">
+              <a:buNone/>
+            </a:pPr>
+            <a:r>
+              <a:rPr lang="en-US" sz="1250" dirty="0">
                 <a:solidFill>
                   <a:srgbClr val="172B3A"/>
                 </a:solidFill>
@@ -34128,9 +34043,9 @@
                 <a:ea typeface="Calibri" pitchFamily="34" charset="-122"/>
                 <a:cs typeface="Calibri" pitchFamily="34" charset="-120"/>
               </a:rPr>
-              <a:t>Tác dụng: ngăn duplicate ngay tại tầng lưu trữ và làm cho MERGE có ý nghĩa xác định.</a:t>
-            </a:r>
-            <a:endParaRPr lang="en-US" sz="1300" dirty="0"/>
+              <a:t>Nhờ đó, dữ liệu trùng bị chặn ngay tại tầng lưu trữ và lệnh MERGE luôn xác định đúng node cần dùng.</a:t>
+            </a:r>
+            <a:endParaRPr lang="en-US" sz="1250" dirty="0"/>
           </a:p>
         </p:txBody>
       </p:sp>
@@ -34267,7 +34182,7 @@
                 <a:ea typeface="Calibri" pitchFamily="34" charset="-122"/>
                 <a:cs typeface="Calibri" pitchFamily="34" charset="-120"/>
               </a:rPr>
-              <a:t>Property existence &amp; validation</a:t>
+              <a:t>Kiểm tra tính hợp lệ</a:t>
             </a:r>
             <a:endParaRPr lang="en-US" sz="1900" dirty="0"/>
           </a:p>
@@ -34300,7 +34215,7 @@
               <a:buNone/>
             </a:pPr>
             <a:r>
-              <a:rPr lang="en-US" sz="1250" dirty="0">
+              <a:rPr lang="en-US" sz="1220" dirty="0">
                 <a:solidFill>
                   <a:srgbClr val="172B3A"/>
                 </a:solidFill>
@@ -34308,22 +34223,22 @@
                 <a:ea typeface="Calibri" pitchFamily="34" charset="-122"/>
                 <a:cs typeface="Calibri" pitchFamily="34" charset="-120"/>
               </a:rPr>
-              <a:t>Các thuộc tính như ID và tên được kiểm tra trước hoặc sau import. Project còn kiểm tra orphan Movie, kiểu đầu mút relationship, thuộc tính bắt buộc và fact suy ra không có bằng chứng.</a:t>
-            </a:r>
-            <a:endParaRPr lang="en-US" sz="1250" dirty="0"/>
-          </a:p>
-          <a:p>
-            <a:pPr indent="0" marL="0">
-              <a:buNone/>
-            </a:pPr>
-            <a:endParaRPr lang="en-US" sz="1250" dirty="0"/>
-          </a:p>
-          <a:p>
-            <a:pPr indent="0" marL="0">
-              <a:buNone/>
-            </a:pPr>
-            <a:r>
-              <a:rPr lang="en-US" sz="1250" dirty="0">
+              <a:t>ID và tên bắt buộc được kiểm tra trước hoặc sau khi nhập. Dự án còn phát hiện Movie không có quan hệ, cạnh nối sai loại node và sự kiện suy ra không có bằng chứng.</a:t>
+            </a:r>
+            <a:endParaRPr lang="en-US" sz="1220" dirty="0"/>
+          </a:p>
+          <a:p>
+            <a:pPr indent="0" marL="0">
+              <a:buNone/>
+            </a:pPr>
+            <a:endParaRPr lang="en-US" sz="1220" dirty="0"/>
+          </a:p>
+          <a:p>
+            <a:pPr indent="0" marL="0">
+              <a:buNone/>
+            </a:pPr>
+            <a:r>
+              <a:rPr lang="en-US" sz="1220" dirty="0">
                 <a:solidFill>
                   <a:srgbClr val="172B3A"/>
                 </a:solidFill>
@@ -34331,9 +34246,9 @@
                 <a:ea typeface="Calibri" pitchFamily="34" charset="-122"/>
                 <a:cs typeface="Calibri" pitchFamily="34" charset="-120"/>
               </a:rPr>
-              <a:t>Constraint trong DB và quality gate trong pipeline bổ sung cho nhau.</a:t>
-            </a:r>
-            <a:endParaRPr lang="en-US" sz="1250" dirty="0"/>
+              <a:t>Ràng buộc trong Neo4j và cổng chất lượng của pipeline bổ sung cho nhau.</a:t>
+            </a:r>
+            <a:endParaRPr lang="en-US" sz="1220" dirty="0"/>
           </a:p>
         </p:txBody>
       </p:sp>
@@ -34470,7 +34385,7 @@
                 <a:ea typeface="Calibri" pitchFamily="34" charset="-122"/>
                 <a:cs typeface="Calibri" pitchFamily="34" charset="-120"/>
               </a:rPr>
-              <a:t>Index và full-text index</a:t>
+              <a:t>Index và chỉ mục toàn văn</a:t>
             </a:r>
             <a:endParaRPr lang="en-US" sz="1900" dirty="0"/>
           </a:p>
@@ -34503,7 +34418,7 @@
               <a:buNone/>
             </a:pPr>
             <a:r>
-              <a:rPr lang="en-US" sz="1300" dirty="0">
+              <a:rPr lang="en-US" sz="1270" dirty="0">
                 <a:solidFill>
                   <a:srgbClr val="172B3A"/>
                 </a:solidFill>
@@ -34511,22 +34426,22 @@
                 <a:ea typeface="Calibri" pitchFamily="34" charset="-122"/>
                 <a:cs typeface="Calibri" pitchFamily="34" charset="-120"/>
               </a:rPr>
-              <a:t>Index tăng tốc tra cứu theo thuộc tính; full-text index tạo candidate cho entity linking theo tên.</a:t>
-            </a:r>
-            <a:endParaRPr lang="en-US" sz="1300" dirty="0"/>
-          </a:p>
-          <a:p>
-            <a:pPr indent="0" marL="0">
-              <a:buNone/>
-            </a:pPr>
-            <a:endParaRPr lang="en-US" sz="1300" dirty="0"/>
-          </a:p>
-          <a:p>
-            <a:pPr indent="0" marL="0">
-              <a:buNone/>
-            </a:pPr>
-            <a:r>
-              <a:rPr lang="en-US" sz="1300" dirty="0">
+              <a:t>Index tăng tốc tra cứu chính xác theo thuộc tính; chỉ mục toàn văn tạo danh sách ứng viên khi tên người dùng nhập không hoàn toàn trùng khớp.</a:t>
+            </a:r>
+            <a:endParaRPr lang="en-US" sz="1270" dirty="0"/>
+          </a:p>
+          <a:p>
+            <a:pPr indent="0" marL="0">
+              <a:buNone/>
+            </a:pPr>
+            <a:endParaRPr lang="en-US" sz="1270" dirty="0"/>
+          </a:p>
+          <a:p>
+            <a:pPr indent="0" marL="0">
+              <a:buNone/>
+            </a:pPr>
+            <a:r>
+              <a:rPr lang="en-US" sz="1270" dirty="0">
                 <a:solidFill>
                   <a:srgbClr val="172B3A"/>
                 </a:solidFill>
@@ -34534,9 +34449,9 @@
                 <a:ea typeface="Calibri" pitchFamily="34" charset="-122"/>
                 <a:cs typeface="Calibri" pitchFamily="34" charset="-120"/>
               </a:rPr>
-              <a:t>Index không thay đổi ngữ nghĩa của graph. Nó chỉ tối ưu cách tìm điểm bắt đầu trước khi traversal tiếp tục qua relationship.</a:t>
-            </a:r>
-            <a:endParaRPr lang="en-US" sz="1300" dirty="0"/>
+              <a:t>Index không chứng minh dữ liệu đúng. Nó chỉ giúp tìm node bắt đầu nhanh hơn trước khi duyệt tiếp các quan hệ.</a:t>
+            </a:r>
+            <a:endParaRPr lang="en-US" sz="1270" dirty="0"/>
           </a:p>
         </p:txBody>
       </p:sp>

--- a/docs/deliverables/slide/movie_knowledge_graph_defense.pptx
+++ b/docs/deliverables/slide/movie_knowledge_graph_defense.pptx
@@ -1666,7 +1666,7 @@
           <a:p>
             <a:r>
               <a:rPr lang="en-US" dirty="0"/>
-              <a:t>Ranker dùng IDF-weighted graph similarity. Đặc trưng chung hiếm đóng góp nhiều hơn đặc trưng phổ biến. Trọng số ưu tiên director và actor. Điểm và explanation đều được tính từ traversal trong Neo4j, không tải toàn graph về Python.</a:t>
+              <a:t>Thuật toán bắt đầu từ phim nguồn và duyệt qua năm loại đặc trưng để tạo candidate: đạo diễn, diễn viên, keyword, thể loại và studio. Mỗi đặc trưng chung đóng góp type_weight nhân với 1 cộng log của (N+1)/(df+1), trong đó N là tổng số Movie và df là số Movie mang đặc trưng đó. Trọng số đúng trong runtime là director 3.0, actor 2.0, keyword 1.5, genre 1.0 và studio 0.75. Đặc trưng hiếm vì vậy đóng góp nhiều hơn đặc trưng phổ biến. Điểm candidate là tổng mọi contribution; Neo4j xếp điểm giảm dần, hòa điểm theo title và lấy Top-K. Explanation được tạo từ đúng các shared feature đã tạo điểm; thuật toán không dùng rating, popularity, hành vi người dùng hay embedding.</a:t>
             </a:r>
             <a:endParaRPr lang="en-US" dirty="0"/>
           </a:p>
@@ -12829,7 +12829,7 @@
                 <a:ea typeface="Calibri" pitchFamily="34" charset="-122"/>
                 <a:cs typeface="Calibri" pitchFamily="34" charset="-120"/>
               </a:rPr>
-              <a:t>Gợi ý giải thích được bằng đóng góp trên đồ thị</a:t>
+              <a:t>Thuật toán gợi ý: tìm đặc trưng chung, tính IDF và xếp hạng</a:t>
             </a:r>
             <a:endParaRPr lang="en-US" sz="2600" dirty="0"/>
           </a:p>
@@ -12870,7 +12870,7 @@
                 <a:ea typeface="Calibri" pitchFamily="34" charset="-122"/>
                 <a:cs typeface="Calibri" pitchFamily="34" charset="-120"/>
               </a:rPr>
-              <a:t>IDF giảm ảnh hưởng của đặc trưng quá phổ biến; mỗi đề xuất kèm các đặc trưng chung tạo điểm.</a:t>
+              <a:t>Neo4j chỉ xét phim có chung ít nhất một đạo diễn, diễn viên, keyword, thể loại hoặc studio với phim nguồn.</a:t>
             </a:r>
             <a:endParaRPr lang="en-US" sz="1250" dirty="0"/>
           </a:p>
@@ -12983,7 +12983,7 @@
         </p:nvSpPr>
         <p:spPr>
           <a:xfrm>
-            <a:off x="8001000" y="2697480"/>
+            <a:off x="8001000" y="2606040"/>
             <a:ext cx="1143000" cy="219456"/>
           </a:xfrm>
           <a:prstGeom prst="rect">
@@ -13022,7 +13022,7 @@
         </p:nvSpPr>
         <p:spPr>
           <a:xfrm>
-            <a:off x="9217152" y="2724912"/>
+            <a:off x="9217152" y="2633472"/>
             <a:ext cx="1536192" cy="164592"/>
           </a:xfrm>
           <a:prstGeom prst="rect">
@@ -13047,7 +13047,7 @@
         </p:nvSpPr>
         <p:spPr>
           <a:xfrm>
-            <a:off x="10881360" y="2697480"/>
+            <a:off x="10881360" y="2606040"/>
             <a:ext cx="457200" cy="219456"/>
           </a:xfrm>
           <a:prstGeom prst="rect">
@@ -13086,7 +13086,7 @@
         </p:nvSpPr>
         <p:spPr>
           <a:xfrm>
-            <a:off x="8001000" y="3355848"/>
+            <a:off x="8001000" y="3099816"/>
             <a:ext cx="1143000" cy="219456"/>
           </a:xfrm>
           <a:prstGeom prst="rect">
@@ -13125,7 +13125,7 @@
         </p:nvSpPr>
         <p:spPr>
           <a:xfrm>
-            <a:off x="9217152" y="3383280"/>
+            <a:off x="9217152" y="3127248"/>
             <a:ext cx="1024128" cy="164592"/>
           </a:xfrm>
           <a:prstGeom prst="rect">
@@ -13150,7 +13150,7 @@
         </p:nvSpPr>
         <p:spPr>
           <a:xfrm>
-            <a:off x="10881360" y="3355848"/>
+            <a:off x="10881360" y="3099816"/>
             <a:ext cx="457200" cy="219456"/>
           </a:xfrm>
           <a:prstGeom prst="rect">
@@ -13189,7 +13189,7 @@
         </p:nvSpPr>
         <p:spPr>
           <a:xfrm>
-            <a:off x="8001000" y="4014216"/>
+            <a:off x="8001000" y="3593592"/>
             <a:ext cx="1143000" cy="219456"/>
           </a:xfrm>
           <a:prstGeom prst="rect">
@@ -13214,6 +13214,109 @@
                 <a:ea typeface="Calibri" pitchFamily="34" charset="-122"/>
                 <a:cs typeface="Calibri" pitchFamily="34" charset="-120"/>
               </a:rPr>
+              <a:t>Keyword</a:t>
+            </a:r>
+            <a:endParaRPr lang="en-US" sz="1200" dirty="0"/>
+          </a:p>
+        </p:txBody>
+      </p:sp>
+      <p:sp>
+        <p:nvSpPr>
+          <p:cNvPr id="15" name="Shape 12"/>
+          <p:cNvSpPr/>
+          <p:nvPr/>
+        </p:nvSpPr>
+        <p:spPr>
+          <a:xfrm>
+            <a:off x="9217152" y="3621024"/>
+            <a:ext cx="768096" cy="164592"/>
+          </a:xfrm>
+          <a:prstGeom prst="rect">
+            <a:avLst/>
+          </a:prstGeom>
+          <a:solidFill>
+            <a:srgbClr val="D38B36"/>
+          </a:solidFill>
+          <a:ln w="12700">
+            <a:solidFill>
+              <a:srgbClr val="D38B36"/>
+            </a:solidFill>
+            <a:prstDash val="solid"/>
+          </a:ln>
+        </p:spPr>
+      </p:sp>
+      <p:sp>
+        <p:nvSpPr>
+          <p:cNvPr id="16" name="Text 13"/>
+          <p:cNvSpPr/>
+          <p:nvPr/>
+        </p:nvSpPr>
+        <p:spPr>
+          <a:xfrm>
+            <a:off x="10881360" y="3593592"/>
+            <a:ext cx="457200" cy="219456"/>
+          </a:xfrm>
+          <a:prstGeom prst="rect">
+            <a:avLst/>
+          </a:prstGeom>
+          <a:noFill/>
+          <a:ln/>
+        </p:spPr>
+        <p:txBody>
+          <a:bodyPr wrap="square" lIns="0" tIns="0" rIns="0" bIns="0" rtlCol="0" anchor="ctr"/>
+          <a:lstStyle/>
+          <a:p>
+            <a:pPr algn="r" indent="0" marL="0">
+              <a:buNone/>
+            </a:pPr>
+            <a:r>
+              <a:rPr lang="en-US" sz="1100" b="1" dirty="0">
+                <a:solidFill>
+                  <a:srgbClr val="D38B36"/>
+                </a:solidFill>
+                <a:latin typeface="Arial" pitchFamily="34" charset="0"/>
+                <a:ea typeface="Arial" pitchFamily="34" charset="-122"/>
+                <a:cs typeface="Arial" pitchFamily="34" charset="-120"/>
+              </a:rPr>
+              <a:t>1,5</a:t>
+            </a:r>
+            <a:endParaRPr lang="en-US" sz="1100" dirty="0"/>
+          </a:p>
+        </p:txBody>
+      </p:sp>
+      <p:sp>
+        <p:nvSpPr>
+          <p:cNvPr id="17" name="Text 14"/>
+          <p:cNvSpPr/>
+          <p:nvPr/>
+        </p:nvSpPr>
+        <p:spPr>
+          <a:xfrm>
+            <a:off x="8001000" y="4087368"/>
+            <a:ext cx="1143000" cy="219456"/>
+          </a:xfrm>
+          <a:prstGeom prst="rect">
+            <a:avLst/>
+          </a:prstGeom>
+          <a:noFill/>
+          <a:ln/>
+        </p:spPr>
+        <p:txBody>
+          <a:bodyPr wrap="square" lIns="0" tIns="0" rIns="0" bIns="0" rtlCol="0" anchor="ctr"/>
+          <a:lstStyle/>
+          <a:p>
+            <a:pPr indent="0" marL="0">
+              <a:buNone/>
+            </a:pPr>
+            <a:r>
+              <a:rPr lang="en-US" sz="1200" b="1" dirty="0">
+                <a:solidFill>
+                  <a:srgbClr val="172B3A"/>
+                </a:solidFill>
+                <a:latin typeface="Calibri" pitchFamily="34" charset="0"/>
+                <a:ea typeface="Calibri" pitchFamily="34" charset="-122"/>
+                <a:cs typeface="Calibri" pitchFamily="34" charset="-120"/>
+              </a:rPr>
               <a:t>Thể loại</a:t>
             </a:r>
             <a:endParaRPr lang="en-US" sz="1200" dirty="0"/>
@@ -13222,14 +13325,14 @@
       </p:sp>
       <p:sp>
         <p:nvSpPr>
-          <p:cNvPr id="15" name="Shape 12"/>
-          <p:cNvSpPr/>
-          <p:nvPr/>
-        </p:nvSpPr>
-        <p:spPr>
-          <a:xfrm>
-            <a:off x="9217152" y="4041648"/>
-            <a:ext cx="768096" cy="164592"/>
+          <p:cNvPr id="18" name="Shape 15"/>
+          <p:cNvSpPr/>
+          <p:nvPr/>
+        </p:nvSpPr>
+        <p:spPr>
+          <a:xfrm>
+            <a:off x="9217152" y="4114800"/>
+            <a:ext cx="512064" cy="164592"/>
           </a:xfrm>
           <a:prstGeom prst="rect">
             <a:avLst/>
@@ -13247,13 +13350,13 @@
       </p:sp>
       <p:sp>
         <p:nvSpPr>
-          <p:cNvPr id="16" name="Text 13"/>
-          <p:cNvSpPr/>
-          <p:nvPr/>
-        </p:nvSpPr>
-        <p:spPr>
-          <a:xfrm>
-            <a:off x="10881360" y="4014216"/>
+          <p:cNvPr id="19" name="Text 16"/>
+          <p:cNvSpPr/>
+          <p:nvPr/>
+        </p:nvSpPr>
+        <p:spPr>
+          <a:xfrm>
+            <a:off x="10881360" y="4087368"/>
             <a:ext cx="457200" cy="219456"/>
           </a:xfrm>
           <a:prstGeom prst="rect">
@@ -13278,7 +13381,7 @@
                 <a:ea typeface="Arial" pitchFamily="34" charset="-122"/>
                 <a:cs typeface="Arial" pitchFamily="34" charset="-120"/>
               </a:rPr>
-              <a:t>1,5</a:t>
+              <a:t>1,0</a:t>
             </a:r>
             <a:endParaRPr lang="en-US" sz="1100" dirty="0"/>
           </a:p>
@@ -13286,13 +13389,13 @@
       </p:sp>
       <p:sp>
         <p:nvSpPr>
-          <p:cNvPr id="17" name="Text 14"/>
-          <p:cNvSpPr/>
-          <p:nvPr/>
-        </p:nvSpPr>
-        <p:spPr>
-          <a:xfrm>
-            <a:off x="8001000" y="4672584"/>
+          <p:cNvPr id="20" name="Text 17"/>
+          <p:cNvSpPr/>
+          <p:nvPr/>
+        </p:nvSpPr>
+        <p:spPr>
+          <a:xfrm>
+            <a:off x="8001000" y="4581144"/>
             <a:ext cx="1143000" cy="219456"/>
           </a:xfrm>
           <a:prstGeom prst="rect">
@@ -13317,7 +13420,7 @@
                 <a:ea typeface="Calibri" pitchFamily="34" charset="-122"/>
                 <a:cs typeface="Calibri" pitchFamily="34" charset="-120"/>
               </a:rPr>
-              <a:t>Từ khóa</a:t>
+              <a:t>Studio</a:t>
             </a:r>
             <a:endParaRPr lang="en-US" sz="1200" dirty="0"/>
           </a:p>
@@ -13325,24 +13428,24 @@
       </p:sp>
       <p:sp>
         <p:nvSpPr>
-          <p:cNvPr id="18" name="Shape 15"/>
-          <p:cNvSpPr/>
-          <p:nvPr/>
-        </p:nvSpPr>
-        <p:spPr>
-          <a:xfrm>
-            <a:off x="9217152" y="4700016"/>
-            <a:ext cx="512064" cy="164592"/>
+          <p:cNvPr id="21" name="Shape 18"/>
+          <p:cNvSpPr/>
+          <p:nvPr/>
+        </p:nvSpPr>
+        <p:spPr>
+          <a:xfrm>
+            <a:off x="9217152" y="4608576"/>
+            <a:ext cx="384048" cy="164592"/>
           </a:xfrm>
           <a:prstGeom prst="rect">
             <a:avLst/>
           </a:prstGeom>
           <a:solidFill>
-            <a:srgbClr val="D38B36"/>
+            <a:srgbClr val="183D5D"/>
           </a:solidFill>
           <a:ln w="12700">
             <a:solidFill>
-              <a:srgbClr val="D38B36"/>
+              <a:srgbClr val="183D5D"/>
             </a:solidFill>
             <a:prstDash val="solid"/>
           </a:ln>
@@ -13350,13 +13453,13 @@
       </p:sp>
       <p:sp>
         <p:nvSpPr>
-          <p:cNvPr id="19" name="Text 16"/>
-          <p:cNvSpPr/>
-          <p:nvPr/>
-        </p:nvSpPr>
-        <p:spPr>
-          <a:xfrm>
-            <a:off x="10881360" y="4672584"/>
+          <p:cNvPr id="22" name="Text 19"/>
+          <p:cNvSpPr/>
+          <p:nvPr/>
+        </p:nvSpPr>
+        <p:spPr>
+          <a:xfrm>
+            <a:off x="10881360" y="4581144"/>
             <a:ext cx="457200" cy="219456"/>
           </a:xfrm>
           <a:prstGeom prst="rect">
@@ -13375,13 +13478,13 @@
             <a:r>
               <a:rPr lang="en-US" sz="1100" b="1" dirty="0">
                 <a:solidFill>
-                  <a:srgbClr val="D38B36"/>
+                  <a:srgbClr val="183D5D"/>
                 </a:solidFill>
                 <a:latin typeface="Arial" pitchFamily="34" charset="0"/>
                 <a:ea typeface="Arial" pitchFamily="34" charset="-122"/>
                 <a:cs typeface="Arial" pitchFamily="34" charset="-120"/>
               </a:rPr>
-              <a:t>1,0</a:t>
+              <a:t>0,75</a:t>
             </a:r>
             <a:endParaRPr lang="en-US" sz="1100" dirty="0"/>
           </a:p>
@@ -13389,18 +13492,18 @@
       </p:sp>
       <p:sp>
         <p:nvSpPr>
-          <p:cNvPr id="20" name="Shape 17"/>
-          <p:cNvSpPr/>
-          <p:nvPr/>
-        </p:nvSpPr>
-        <p:spPr>
-          <a:xfrm>
-            <a:off x="7973568" y="5138928"/>
-            <a:ext cx="3566160" cy="932688"/>
+          <p:cNvPr id="23" name="Shape 20"/>
+          <p:cNvSpPr/>
+          <p:nvPr/>
+        </p:nvSpPr>
+        <p:spPr>
+          <a:xfrm>
+            <a:off x="7973568" y="5230368"/>
+            <a:ext cx="3566160" cy="841248"/>
           </a:xfrm>
           <a:prstGeom prst="roundRect">
             <a:avLst>
-              <a:gd name="adj" fmla="val 5882"/>
+              <a:gd name="adj" fmla="val 6522"/>
             </a:avLst>
           </a:prstGeom>
           <a:solidFill>
@@ -13416,13 +13519,13 @@
       </p:sp>
       <p:sp>
         <p:nvSpPr>
-          <p:cNvPr id="21" name="Text 18"/>
-          <p:cNvSpPr/>
-          <p:nvPr/>
-        </p:nvSpPr>
-        <p:spPr>
-          <a:xfrm>
-            <a:off x="8202168" y="5321808"/>
+          <p:cNvPr id="24" name="Text 21"/>
+          <p:cNvSpPr/>
+          <p:nvPr/>
+        </p:nvSpPr>
+        <p:spPr>
+          <a:xfrm>
+            <a:off x="8202168" y="5413248"/>
             <a:ext cx="3108960" cy="301752"/>
           </a:xfrm>
           <a:prstGeom prst="rect">
@@ -13449,7 +13552,7 @@
                 <a:ea typeface="Calibri" pitchFamily="34" charset="-122"/>
                 <a:cs typeface="Calibri" pitchFamily="34" charset="-120"/>
               </a:rPr>
-              <a:t>Mỗi điểm số đều có lời giải thích</a:t>
+              <a:t>Tổng điểm → Top-K → giải thích</a:t>
             </a:r>
             <a:endParaRPr lang="en-US" sz="1200" dirty="0"/>
           </a:p>
@@ -13457,14 +13560,14 @@
       </p:sp>
       <p:sp>
         <p:nvSpPr>
-          <p:cNvPr id="22" name="Text 19"/>
-          <p:cNvSpPr/>
-          <p:nvPr/>
-        </p:nvSpPr>
-        <p:spPr>
-          <a:xfrm>
-            <a:off x="8202168" y="5742432"/>
-            <a:ext cx="3108960" cy="146304"/>
+          <p:cNvPr id="25" name="Text 22"/>
+          <p:cNvSpPr/>
+          <p:nvPr/>
+        </p:nvSpPr>
+        <p:spPr>
+          <a:xfrm>
+            <a:off x="8202168" y="5833872"/>
+            <a:ext cx="3108960" cy="54864"/>
           </a:xfrm>
           <a:prstGeom prst="rect">
             <a:avLst/>
@@ -13482,7 +13585,7 @@
               <a:buNone/>
             </a:pPr>
             <a:r>
-              <a:rPr lang="en-US" sz="920" dirty="0">
+              <a:rPr lang="en-US" sz="870" dirty="0">
                 <a:solidFill>
                   <a:srgbClr val="172B3A"/>
                 </a:solidFill>
@@ -13490,15 +13593,15 @@
                 <a:ea typeface="Calibri" pitchFamily="34" charset="-122"/>
                 <a:cs typeface="Calibri" pitchFamily="34" charset="-120"/>
               </a:rPr>
-              <a:t>Neo4j trả cả tổng điểm và các đặc trưng chung đã đóng góp vào điểm đó.</a:t>
-            </a:r>
-            <a:endParaRPr lang="en-US" sz="920" dirty="0"/>
-          </a:p>
-        </p:txBody>
-      </p:sp>
-      <p:sp>
-        <p:nvSpPr>
-          <p:cNvPr id="23" name="Text 20"/>
+              <a:t>Cộng mọi contribution, xếp điểm giảm dần và trả chính các shared feature đã tạo điểm.</a:t>
+            </a:r>
+            <a:endParaRPr lang="en-US" sz="870" dirty="0"/>
+          </a:p>
+        </p:txBody>
+      </p:sp>
+      <p:sp>
+        <p:nvSpPr>
+          <p:cNvPr id="26" name="Text 23"/>
           <p:cNvSpPr/>
           <p:nvPr/>
         </p:nvSpPr>
